--- a/lectures/week_11_model_selection/le11_assignment.pptx
+++ b/lectures/week_11_model_selection/le11_assignment.pptx
@@ -7,10 +7,9 @@
   <p:sldIdLst>
     <p:sldId id="258" r:id="rId2"/>
     <p:sldId id="265" r:id="rId3"/>
-    <p:sldId id="264" r:id="rId4"/>
-    <p:sldId id="266" r:id="rId5"/>
-    <p:sldId id="259" r:id="rId6"/>
-    <p:sldId id="257" r:id="rId7"/>
+    <p:sldId id="266" r:id="rId4"/>
+    <p:sldId id="259" r:id="rId5"/>
+    <p:sldId id="257" r:id="rId6"/>
   </p:sldIdLst>
   <p:sldSz cx="12192000" cy="6858000"/>
   <p:notesSz cx="6858000" cy="9144000"/>
@@ -246,7 +245,7 @@
           <a:p>
             <a:fld id="{272F3363-993E-4E40-AB86-43582E14989C}" type="datetimeFigureOut">
               <a:rPr lang="en-US" smtClean="0"/>
-              <a:t>4/1/24</a:t>
+              <a:t>4/9/26</a:t>
             </a:fld>
             <a:endParaRPr lang="en-US"/>
           </a:p>
@@ -414,7 +413,7 @@
           <a:p>
             <a:fld id="{272F3363-993E-4E40-AB86-43582E14989C}" type="datetimeFigureOut">
               <a:rPr lang="en-US" smtClean="0"/>
-              <a:t>4/1/24</a:t>
+              <a:t>4/9/26</a:t>
             </a:fld>
             <a:endParaRPr lang="en-US"/>
           </a:p>
@@ -592,7 +591,7 @@
           <a:p>
             <a:fld id="{272F3363-993E-4E40-AB86-43582E14989C}" type="datetimeFigureOut">
               <a:rPr lang="en-US" smtClean="0"/>
-              <a:t>4/1/24</a:t>
+              <a:t>4/9/26</a:t>
             </a:fld>
             <a:endParaRPr lang="en-US"/>
           </a:p>
@@ -760,7 +759,7 @@
           <a:p>
             <a:fld id="{272F3363-993E-4E40-AB86-43582E14989C}" type="datetimeFigureOut">
               <a:rPr lang="en-US" smtClean="0"/>
-              <a:t>4/1/24</a:t>
+              <a:t>4/9/26</a:t>
             </a:fld>
             <a:endParaRPr lang="en-US"/>
           </a:p>
@@ -1005,7 +1004,7 @@
           <a:p>
             <a:fld id="{272F3363-993E-4E40-AB86-43582E14989C}" type="datetimeFigureOut">
               <a:rPr lang="en-US" smtClean="0"/>
-              <a:t>4/1/24</a:t>
+              <a:t>4/9/26</a:t>
             </a:fld>
             <a:endParaRPr lang="en-US"/>
           </a:p>
@@ -1234,7 +1233,7 @@
           <a:p>
             <a:fld id="{272F3363-993E-4E40-AB86-43582E14989C}" type="datetimeFigureOut">
               <a:rPr lang="en-US" smtClean="0"/>
-              <a:t>4/1/24</a:t>
+              <a:t>4/9/26</a:t>
             </a:fld>
             <a:endParaRPr lang="en-US"/>
           </a:p>
@@ -1598,7 +1597,7 @@
           <a:p>
             <a:fld id="{272F3363-993E-4E40-AB86-43582E14989C}" type="datetimeFigureOut">
               <a:rPr lang="en-US" smtClean="0"/>
-              <a:t>4/1/24</a:t>
+              <a:t>4/9/26</a:t>
             </a:fld>
             <a:endParaRPr lang="en-US"/>
           </a:p>
@@ -1715,7 +1714,7 @@
           <a:p>
             <a:fld id="{272F3363-993E-4E40-AB86-43582E14989C}" type="datetimeFigureOut">
               <a:rPr lang="en-US" smtClean="0"/>
-              <a:t>4/1/24</a:t>
+              <a:t>4/9/26</a:t>
             </a:fld>
             <a:endParaRPr lang="en-US"/>
           </a:p>
@@ -1810,7 +1809,7 @@
           <a:p>
             <a:fld id="{272F3363-993E-4E40-AB86-43582E14989C}" type="datetimeFigureOut">
               <a:rPr lang="en-US" smtClean="0"/>
-              <a:t>4/1/24</a:t>
+              <a:t>4/9/26</a:t>
             </a:fld>
             <a:endParaRPr lang="en-US"/>
           </a:p>
@@ -2085,7 +2084,7 @@
           <a:p>
             <a:fld id="{272F3363-993E-4E40-AB86-43582E14989C}" type="datetimeFigureOut">
               <a:rPr lang="en-US" smtClean="0"/>
-              <a:t>4/1/24</a:t>
+              <a:t>4/9/26</a:t>
             </a:fld>
             <a:endParaRPr lang="en-US"/>
           </a:p>
@@ -2337,7 +2336,7 @@
           <a:p>
             <a:fld id="{272F3363-993E-4E40-AB86-43582E14989C}" type="datetimeFigureOut">
               <a:rPr lang="en-US" smtClean="0"/>
-              <a:t>4/1/24</a:t>
+              <a:t>4/9/26</a:t>
             </a:fld>
             <a:endParaRPr lang="en-US"/>
           </a:p>
@@ -2548,7 +2547,7 @@
           <a:p>
             <a:fld id="{272F3363-993E-4E40-AB86-43582E14989C}" type="datetimeFigureOut">
               <a:rPr lang="en-US" smtClean="0"/>
-              <a:t>4/1/24</a:t>
+              <a:t>4/9/26</a:t>
             </a:fld>
             <a:endParaRPr lang="en-US"/>
           </a:p>
@@ -3068,7 +3067,7 @@
           <a:p>
             <a:r>
               <a:rPr lang="en-US" dirty="0"/>
-              <a:t>Final presentation project plan – due Apr 9</a:t>
+              <a:t>Final project plan – due Apr 14</a:t>
             </a:r>
           </a:p>
         </p:txBody>
@@ -3293,7 +3292,7 @@
 </file>
 
 <file path=ppt/slides/slide3.xml><?xml version="1.0" encoding="utf-8"?>
-<p:sld xmlns:a="http://schemas.openxmlformats.org/drawingml/2006/main" xmlns:r="http://schemas.openxmlformats.org/officeDocument/2006/relationships" xmlns:p="http://schemas.openxmlformats.org/presentationml/2006/main">
+<p:sld xmlns:a="http://schemas.openxmlformats.org/drawingml/2006/main" xmlns:r="http://schemas.openxmlformats.org/officeDocument/2006/relationships" xmlns:p="http://schemas.openxmlformats.org/presentationml/2006/main" show="0">
   <p:cSld>
     <p:spTree>
       <p:nvGrpSpPr>
@@ -3311,2082 +3310,92 @@
       </p:grpSpPr>
       <p:sp>
         <p:nvSpPr>
-          <p:cNvPr id="2" name="Title 1"/>
-          <p:cNvSpPr>
-            <a:spLocks noGrp="1"/>
-          </p:cNvSpPr>
-          <p:nvPr>
-            <p:ph type="title"/>
-          </p:nvPr>
-        </p:nvSpPr>
-        <p:spPr/>
-        <p:txBody>
-          <a:bodyPr/>
-          <a:lstStyle/>
-          <a:p>
-            <a:r>
-              <a:rPr lang="en-US" dirty="0"/>
-              <a:t>Final Presentation Schedule</a:t>
-            </a:r>
-          </a:p>
-        </p:txBody>
-      </p:sp>
-      <p:graphicFrame>
-        <p:nvGraphicFramePr>
-          <p:cNvPr id="4" name="Content Placeholder 3">
+          <p:cNvPr id="2" name="Title 1">
             <a:extLst>
               <a:ext uri="{FF2B5EF4-FFF2-40B4-BE49-F238E27FC236}">
-                <a16:creationId xmlns:a16="http://schemas.microsoft.com/office/drawing/2014/main" id="{1095B608-D62C-8FAF-6D1E-B8D3E6FCE17D}"/>
+                <a16:creationId xmlns:a16="http://schemas.microsoft.com/office/drawing/2014/main" id="{D23CC5D4-7773-297E-9CA9-DE6874CC05DB}"/>
               </a:ext>
             </a:extLst>
           </p:cNvPr>
-          <p:cNvGraphicFramePr>
-            <a:graphicFrameLocks noGrp="1"/>
-          </p:cNvGraphicFramePr>
+          <p:cNvSpPr>
+            <a:spLocks noGrp="1"/>
+          </p:cNvSpPr>
+          <p:nvPr>
+            <p:ph type="title"/>
+          </p:nvPr>
+        </p:nvSpPr>
+        <p:spPr/>
+        <p:txBody>
+          <a:bodyPr/>
+          <a:lstStyle/>
+          <a:p>
+            <a:r>
+              <a:rPr lang="en-US" dirty="0"/>
+              <a:t>Final Presentation Quick Q &amp; A</a:t>
+            </a:r>
+          </a:p>
+        </p:txBody>
+      </p:sp>
+      <p:sp>
+        <p:nvSpPr>
+          <p:cNvPr id="3" name="Content Placeholder 2">
+            <a:extLst>
+              <a:ext uri="{FF2B5EF4-FFF2-40B4-BE49-F238E27FC236}">
+                <a16:creationId xmlns:a16="http://schemas.microsoft.com/office/drawing/2014/main" id="{2AFAF419-B35D-21DF-0F98-BA3A76CC5180}"/>
+              </a:ext>
+            </a:extLst>
+          </p:cNvPr>
+          <p:cNvSpPr>
+            <a:spLocks noGrp="1"/>
+          </p:cNvSpPr>
           <p:nvPr>
             <p:ph idx="1"/>
-            <p:extLst>
-              <p:ext uri="{D42A27DB-BD31-4B8C-83A1-F6EECF244321}">
-                <p14:modId xmlns:p14="http://schemas.microsoft.com/office/powerpoint/2010/main" val="1827272137"/>
-              </p:ext>
-            </p:extLst>
-          </p:nvPr>
-        </p:nvGraphicFramePr>
-        <p:xfrm>
-          <a:off x="1288895" y="1690688"/>
-          <a:ext cx="7696200" cy="2423160"/>
-        </p:xfrm>
-        <a:graphic>
-          <a:graphicData uri="http://schemas.openxmlformats.org/drawingml/2006/table">
-            <a:tbl>
-              <a:tblPr/>
-              <a:tblGrid>
-                <a:gridCol w="952500">
-                  <a:extLst>
-                    <a:ext uri="{9D8B030D-6E8A-4147-A177-3AD203B41FA5}">
-                      <a16:colId xmlns:a16="http://schemas.microsoft.com/office/drawing/2014/main" val="2935843282"/>
-                    </a:ext>
-                  </a:extLst>
-                </a:gridCol>
-                <a:gridCol w="1323975">
-                  <a:extLst>
-                    <a:ext uri="{9D8B030D-6E8A-4147-A177-3AD203B41FA5}">
-                      <a16:colId xmlns:a16="http://schemas.microsoft.com/office/drawing/2014/main" val="1420906636"/>
-                    </a:ext>
-                  </a:extLst>
-                </a:gridCol>
-                <a:gridCol w="1800225">
-                  <a:extLst>
-                    <a:ext uri="{9D8B030D-6E8A-4147-A177-3AD203B41FA5}">
-                      <a16:colId xmlns:a16="http://schemas.microsoft.com/office/drawing/2014/main" val="293199539"/>
-                    </a:ext>
-                  </a:extLst>
-                </a:gridCol>
-                <a:gridCol w="1190625">
-                  <a:extLst>
-                    <a:ext uri="{9D8B030D-6E8A-4147-A177-3AD203B41FA5}">
-                      <a16:colId xmlns:a16="http://schemas.microsoft.com/office/drawing/2014/main" val="400828708"/>
-                    </a:ext>
-                  </a:extLst>
-                </a:gridCol>
-                <a:gridCol w="1085850">
-                  <a:extLst>
-                    <a:ext uri="{9D8B030D-6E8A-4147-A177-3AD203B41FA5}">
-                      <a16:colId xmlns:a16="http://schemas.microsoft.com/office/drawing/2014/main" val="615867197"/>
-                    </a:ext>
-                  </a:extLst>
-                </a:gridCol>
-                <a:gridCol w="1343025">
-                  <a:extLst>
-                    <a:ext uri="{9D8B030D-6E8A-4147-A177-3AD203B41FA5}">
-                      <a16:colId xmlns:a16="http://schemas.microsoft.com/office/drawing/2014/main" val="343784003"/>
-                    </a:ext>
-                  </a:extLst>
-                </a:gridCol>
-              </a:tblGrid>
-              <a:tr h="200025">
-                <a:tc>
-                  <a:txBody>
-                    <a:bodyPr/>
-                    <a:lstStyle/>
-                    <a:p>
-                      <a:pPr rtl="0" fontAlgn="b"/>
-                      <a:endParaRPr lang="en-US">
-                        <a:effectLst/>
-                      </a:endParaRPr>
-                    </a:p>
-                  </a:txBody>
-                  <a:tcPr marL="28575" marR="28575" marT="19050" marB="19050" anchor="b">
-                    <a:lnL w="9525" cap="flat" cmpd="sng" algn="ctr">
-                      <a:solidFill>
-                        <a:srgbClr val="CCCCCC"/>
-                      </a:solidFill>
-                      <a:prstDash val="solid"/>
-                      <a:round/>
-                      <a:headEnd type="none" w="med" len="med"/>
-                      <a:tailEnd type="none" w="med" len="med"/>
-                    </a:lnL>
-                    <a:lnR w="9525" cap="flat" cmpd="sng" algn="ctr">
-                      <a:solidFill>
-                        <a:srgbClr val="CCCCCC"/>
-                      </a:solidFill>
-                      <a:prstDash val="solid"/>
-                      <a:round/>
-                      <a:headEnd type="none" w="med" len="med"/>
-                      <a:tailEnd type="none" w="med" len="med"/>
-                    </a:lnR>
-                    <a:lnT w="9525" cap="flat" cmpd="sng" algn="ctr">
-                      <a:solidFill>
-                        <a:srgbClr val="CCCCCC"/>
-                      </a:solidFill>
-                      <a:prstDash val="solid"/>
-                      <a:round/>
-                      <a:headEnd type="none" w="med" len="med"/>
-                      <a:tailEnd type="none" w="med" len="med"/>
-                    </a:lnT>
-                    <a:lnB w="9525" cap="flat" cmpd="sng" algn="ctr">
-                      <a:solidFill>
-                        <a:srgbClr val="CCCCCC"/>
-                      </a:solidFill>
-                      <a:prstDash val="solid"/>
-                      <a:round/>
-                      <a:headEnd type="none" w="med" len="med"/>
-                      <a:tailEnd type="none" w="med" len="med"/>
-                    </a:lnB>
-                  </a:tcPr>
-                </a:tc>
-                <a:tc>
-                  <a:txBody>
-                    <a:bodyPr/>
-                    <a:lstStyle/>
-                    <a:p>
-                      <a:pPr rtl="0" fontAlgn="b"/>
-                      <a:r>
-                        <a:rPr lang="en-US" sz="1200" b="0">
-                          <a:effectLst/>
-                          <a:latin typeface="Calibri" panose="020F0502020204030204" pitchFamily="34" charset="0"/>
-                        </a:rPr>
-                        <a:t>Name</a:t>
-                      </a:r>
-                    </a:p>
-                  </a:txBody>
-                  <a:tcPr marL="28575" marR="28575" marT="19050" marB="19050" anchor="b">
-                    <a:lnL w="9525" cap="flat" cmpd="sng" algn="ctr">
-                      <a:solidFill>
-                        <a:srgbClr val="CCCCCC"/>
-                      </a:solidFill>
-                      <a:prstDash val="solid"/>
-                      <a:round/>
-                      <a:headEnd type="none" w="med" len="med"/>
-                      <a:tailEnd type="none" w="med" len="med"/>
-                    </a:lnL>
-                    <a:lnR w="9525" cap="flat" cmpd="sng" algn="ctr">
-                      <a:solidFill>
-                        <a:srgbClr val="CCCCCC"/>
-                      </a:solidFill>
-                      <a:prstDash val="solid"/>
-                      <a:round/>
-                      <a:headEnd type="none" w="med" len="med"/>
-                      <a:tailEnd type="none" w="med" len="med"/>
-                    </a:lnR>
-                    <a:lnT w="9525" cap="flat" cmpd="sng" algn="ctr">
-                      <a:solidFill>
-                        <a:srgbClr val="CCCCCC"/>
-                      </a:solidFill>
-                      <a:prstDash val="solid"/>
-                      <a:round/>
-                      <a:headEnd type="none" w="med" len="med"/>
-                      <a:tailEnd type="none" w="med" len="med"/>
-                    </a:lnT>
-                    <a:lnB w="9525" cap="flat" cmpd="sng" algn="ctr">
-                      <a:solidFill>
-                        <a:srgbClr val="CCCCCC"/>
-                      </a:solidFill>
-                      <a:prstDash val="solid"/>
-                      <a:round/>
-                      <a:headEnd type="none" w="med" len="med"/>
-                      <a:tailEnd type="none" w="med" len="med"/>
-                    </a:lnB>
-                  </a:tcPr>
-                </a:tc>
-                <a:tc>
-                  <a:txBody>
-                    <a:bodyPr/>
-                    <a:lstStyle/>
-                    <a:p>
-                      <a:pPr rtl="0" fontAlgn="b"/>
-                      <a:r>
-                        <a:rPr lang="en-US" sz="1200" b="0">
-                          <a:effectLst/>
-                          <a:latin typeface="Calibri" panose="020F0502020204030204" pitchFamily="34" charset="0"/>
-                        </a:rPr>
-                        <a:t>Name</a:t>
-                      </a:r>
-                    </a:p>
-                  </a:txBody>
-                  <a:tcPr marL="28575" marR="28575" marT="19050" marB="19050" anchor="b">
-                    <a:lnL w="9525" cap="flat" cmpd="sng" algn="ctr">
-                      <a:solidFill>
-                        <a:srgbClr val="CCCCCC"/>
-                      </a:solidFill>
-                      <a:prstDash val="solid"/>
-                      <a:round/>
-                      <a:headEnd type="none" w="med" len="med"/>
-                      <a:tailEnd type="none" w="med" len="med"/>
-                    </a:lnL>
-                    <a:lnR w="9525" cap="flat" cmpd="sng" algn="ctr">
-                      <a:solidFill>
-                        <a:srgbClr val="CCCCCC"/>
-                      </a:solidFill>
-                      <a:prstDash val="solid"/>
-                      <a:round/>
-                      <a:headEnd type="none" w="med" len="med"/>
-                      <a:tailEnd type="none" w="med" len="med"/>
-                    </a:lnR>
-                    <a:lnT w="9525" cap="flat" cmpd="sng" algn="ctr">
-                      <a:solidFill>
-                        <a:srgbClr val="CCCCCC"/>
-                      </a:solidFill>
-                      <a:prstDash val="solid"/>
-                      <a:round/>
-                      <a:headEnd type="none" w="med" len="med"/>
-                      <a:tailEnd type="none" w="med" len="med"/>
-                    </a:lnT>
-                    <a:lnB w="9525" cap="flat" cmpd="sng" algn="ctr">
-                      <a:solidFill>
-                        <a:srgbClr val="CCCCCC"/>
-                      </a:solidFill>
-                      <a:prstDash val="solid"/>
-                      <a:round/>
-                      <a:headEnd type="none" w="med" len="med"/>
-                      <a:tailEnd type="none" w="med" len="med"/>
-                    </a:lnB>
-                  </a:tcPr>
-                </a:tc>
-                <a:tc>
-                  <a:txBody>
-                    <a:bodyPr/>
-                    <a:lstStyle/>
-                    <a:p>
-                      <a:pPr rtl="0" fontAlgn="b"/>
-                      <a:r>
-                        <a:rPr lang="en-US" sz="1200" b="0">
-                          <a:effectLst/>
-                          <a:latin typeface="Calibri" panose="020F0502020204030204" pitchFamily="34" charset="0"/>
-                        </a:rPr>
-                        <a:t>Name</a:t>
-                      </a:r>
-                    </a:p>
-                  </a:txBody>
-                  <a:tcPr marL="28575" marR="28575" marT="19050" marB="19050" anchor="b">
-                    <a:lnL w="9525" cap="flat" cmpd="sng" algn="ctr">
-                      <a:solidFill>
-                        <a:srgbClr val="CCCCCC"/>
-                      </a:solidFill>
-                      <a:prstDash val="solid"/>
-                      <a:round/>
-                      <a:headEnd type="none" w="med" len="med"/>
-                      <a:tailEnd type="none" w="med" len="med"/>
-                    </a:lnL>
-                    <a:lnR w="9525" cap="flat" cmpd="sng" algn="ctr">
-                      <a:solidFill>
-                        <a:srgbClr val="CCCCCC"/>
-                      </a:solidFill>
-                      <a:prstDash val="solid"/>
-                      <a:round/>
-                      <a:headEnd type="none" w="med" len="med"/>
-                      <a:tailEnd type="none" w="med" len="med"/>
-                    </a:lnR>
-                    <a:lnT w="9525" cap="flat" cmpd="sng" algn="ctr">
-                      <a:solidFill>
-                        <a:srgbClr val="CCCCCC"/>
-                      </a:solidFill>
-                      <a:prstDash val="solid"/>
-                      <a:round/>
-                      <a:headEnd type="none" w="med" len="med"/>
-                      <a:tailEnd type="none" w="med" len="med"/>
-                    </a:lnT>
-                    <a:lnB w="9525" cap="flat" cmpd="sng" algn="ctr">
-                      <a:solidFill>
-                        <a:srgbClr val="CCCCCC"/>
-                      </a:solidFill>
-                      <a:prstDash val="solid"/>
-                      <a:round/>
-                      <a:headEnd type="none" w="med" len="med"/>
-                      <a:tailEnd type="none" w="med" len="med"/>
-                    </a:lnB>
-                  </a:tcPr>
-                </a:tc>
-                <a:tc>
-                  <a:txBody>
-                    <a:bodyPr/>
-                    <a:lstStyle/>
-                    <a:p>
-                      <a:pPr rtl="0" fontAlgn="b"/>
-                      <a:r>
-                        <a:rPr lang="en-US" sz="1200" b="0">
-                          <a:effectLst/>
-                          <a:latin typeface="Calibri" panose="020F0502020204030204" pitchFamily="34" charset="0"/>
-                        </a:rPr>
-                        <a:t>Name</a:t>
-                      </a:r>
-                    </a:p>
-                  </a:txBody>
-                  <a:tcPr marL="28575" marR="28575" marT="19050" marB="19050" anchor="b">
-                    <a:lnL w="9525" cap="flat" cmpd="sng" algn="ctr">
-                      <a:solidFill>
-                        <a:srgbClr val="CCCCCC"/>
-                      </a:solidFill>
-                      <a:prstDash val="solid"/>
-                      <a:round/>
-                      <a:headEnd type="none" w="med" len="med"/>
-                      <a:tailEnd type="none" w="med" len="med"/>
-                    </a:lnL>
-                    <a:lnR w="9525" cap="flat" cmpd="sng" algn="ctr">
-                      <a:solidFill>
-                        <a:srgbClr val="CCCCCC"/>
-                      </a:solidFill>
-                      <a:prstDash val="solid"/>
-                      <a:round/>
-                      <a:headEnd type="none" w="med" len="med"/>
-                      <a:tailEnd type="none" w="med" len="med"/>
-                    </a:lnR>
-                    <a:lnT w="9525" cap="flat" cmpd="sng" algn="ctr">
-                      <a:solidFill>
-                        <a:srgbClr val="CCCCCC"/>
-                      </a:solidFill>
-                      <a:prstDash val="solid"/>
-                      <a:round/>
-                      <a:headEnd type="none" w="med" len="med"/>
-                      <a:tailEnd type="none" w="med" len="med"/>
-                    </a:lnT>
-                    <a:lnB w="9525" cap="flat" cmpd="sng" algn="ctr">
-                      <a:solidFill>
-                        <a:srgbClr val="CCCCCC"/>
-                      </a:solidFill>
-                      <a:prstDash val="solid"/>
-                      <a:round/>
-                      <a:headEnd type="none" w="med" len="med"/>
-                      <a:tailEnd type="none" w="med" len="med"/>
-                    </a:lnB>
-                  </a:tcPr>
-                </a:tc>
-                <a:tc>
-                  <a:txBody>
-                    <a:bodyPr/>
-                    <a:lstStyle/>
-                    <a:p>
-                      <a:pPr rtl="0" fontAlgn="b"/>
-                      <a:r>
-                        <a:rPr lang="en-US">
-                          <a:effectLst/>
-                        </a:rPr>
-                        <a:t>Name</a:t>
-                      </a:r>
-                    </a:p>
-                  </a:txBody>
-                  <a:tcPr marL="28575" marR="28575" marT="19050" marB="19050" anchor="b">
-                    <a:lnL w="9525" cap="flat" cmpd="sng" algn="ctr">
-                      <a:solidFill>
-                        <a:srgbClr val="CCCCCC"/>
-                      </a:solidFill>
-                      <a:prstDash val="solid"/>
-                      <a:round/>
-                      <a:headEnd type="none" w="med" len="med"/>
-                      <a:tailEnd type="none" w="med" len="med"/>
-                    </a:lnL>
-                    <a:lnR w="9525" cap="flat" cmpd="sng" algn="ctr">
-                      <a:solidFill>
-                        <a:srgbClr val="CCCCCC"/>
-                      </a:solidFill>
-                      <a:prstDash val="solid"/>
-                      <a:round/>
-                      <a:headEnd type="none" w="med" len="med"/>
-                      <a:tailEnd type="none" w="med" len="med"/>
-                    </a:lnR>
-                    <a:lnT w="9525" cap="flat" cmpd="sng" algn="ctr">
-                      <a:solidFill>
-                        <a:srgbClr val="CCCCCC"/>
-                      </a:solidFill>
-                      <a:prstDash val="solid"/>
-                      <a:round/>
-                      <a:headEnd type="none" w="med" len="med"/>
-                      <a:tailEnd type="none" w="med" len="med"/>
-                    </a:lnT>
-                    <a:lnB w="9525" cap="flat" cmpd="sng" algn="ctr">
-                      <a:solidFill>
-                        <a:srgbClr val="CCCCCC"/>
-                      </a:solidFill>
-                      <a:prstDash val="solid"/>
-                      <a:round/>
-                      <a:headEnd type="none" w="med" len="med"/>
-                      <a:tailEnd type="none" w="med" len="med"/>
-                    </a:lnB>
-                  </a:tcPr>
-                </a:tc>
-                <a:extLst>
-                  <a:ext uri="{0D108BD9-81ED-4DB2-BD59-A6C34878D82A}">
-                    <a16:rowId xmlns:a16="http://schemas.microsoft.com/office/drawing/2014/main" val="3386200687"/>
-                  </a:ext>
-                </a:extLst>
-              </a:tr>
-              <a:tr h="200025">
-                <a:tc>
-                  <a:txBody>
-                    <a:bodyPr/>
-                    <a:lstStyle/>
-                    <a:p>
-                      <a:pPr algn="r" rtl="0" fontAlgn="b"/>
-                      <a:r>
-                        <a:rPr lang="en-US" sz="1200" b="0">
-                          <a:effectLst/>
-                          <a:latin typeface="Calibri" panose="020F0502020204030204" pitchFamily="34" charset="0"/>
-                        </a:rPr>
-                        <a:t>16-Apr</a:t>
-                      </a:r>
-                    </a:p>
-                  </a:txBody>
-                  <a:tcPr marL="28575" marR="28575" marT="19050" marB="19050" anchor="b">
-                    <a:lnL w="9525" cap="flat" cmpd="sng" algn="ctr">
-                      <a:solidFill>
-                        <a:srgbClr val="CCCCCC"/>
-                      </a:solidFill>
-                      <a:prstDash val="solid"/>
-                      <a:round/>
-                      <a:headEnd type="none" w="med" len="med"/>
-                      <a:tailEnd type="none" w="med" len="med"/>
-                    </a:lnL>
-                    <a:lnR w="9525" cap="flat" cmpd="sng" algn="ctr">
-                      <a:solidFill>
-                        <a:srgbClr val="CCCCCC"/>
-                      </a:solidFill>
-                      <a:prstDash val="solid"/>
-                      <a:round/>
-                      <a:headEnd type="none" w="med" len="med"/>
-                      <a:tailEnd type="none" w="med" len="med"/>
-                    </a:lnR>
-                    <a:lnT w="9525" cap="flat" cmpd="sng" algn="ctr">
-                      <a:solidFill>
-                        <a:srgbClr val="CCCCCC"/>
-                      </a:solidFill>
-                      <a:prstDash val="solid"/>
-                      <a:round/>
-                      <a:headEnd type="none" w="med" len="med"/>
-                      <a:tailEnd type="none" w="med" len="med"/>
-                    </a:lnT>
-                    <a:lnB w="9525" cap="flat" cmpd="sng" algn="ctr">
-                      <a:solidFill>
-                        <a:srgbClr val="CCCCCC"/>
-                      </a:solidFill>
-                      <a:prstDash val="solid"/>
-                      <a:round/>
-                      <a:headEnd type="none" w="med" len="med"/>
-                      <a:tailEnd type="none" w="med" len="med"/>
-                    </a:lnB>
-                  </a:tcPr>
-                </a:tc>
-                <a:tc>
-                  <a:txBody>
-                    <a:bodyPr/>
-                    <a:lstStyle/>
-                    <a:p>
-                      <a:pPr rtl="0" fontAlgn="b"/>
-                      <a:r>
-                        <a:rPr lang="en-US" sz="1200" b="0">
-                          <a:effectLst/>
-                          <a:latin typeface="Calibri" panose="020F0502020204030204" pitchFamily="34" charset="0"/>
-                        </a:rPr>
-                        <a:t>Bridget Re</a:t>
-                      </a:r>
-                    </a:p>
-                  </a:txBody>
-                  <a:tcPr marL="28575" marR="28575" marT="19050" marB="19050" anchor="b">
-                    <a:lnL w="9525" cap="flat" cmpd="sng" algn="ctr">
-                      <a:solidFill>
-                        <a:srgbClr val="CCCCCC"/>
-                      </a:solidFill>
-                      <a:prstDash val="solid"/>
-                      <a:round/>
-                      <a:headEnd type="none" w="med" len="med"/>
-                      <a:tailEnd type="none" w="med" len="med"/>
-                    </a:lnL>
-                    <a:lnR w="9525" cap="flat" cmpd="sng" algn="ctr">
-                      <a:solidFill>
-                        <a:srgbClr val="CCCCCC"/>
-                      </a:solidFill>
-                      <a:prstDash val="solid"/>
-                      <a:round/>
-                      <a:headEnd type="none" w="med" len="med"/>
-                      <a:tailEnd type="none" w="med" len="med"/>
-                    </a:lnR>
-                    <a:lnT w="9525" cap="flat" cmpd="sng" algn="ctr">
-                      <a:solidFill>
-                        <a:srgbClr val="CCCCCC"/>
-                      </a:solidFill>
-                      <a:prstDash val="solid"/>
-                      <a:round/>
-                      <a:headEnd type="none" w="med" len="med"/>
-                      <a:tailEnd type="none" w="med" len="med"/>
-                    </a:lnT>
-                    <a:lnB w="9525" cap="flat" cmpd="sng" algn="ctr">
-                      <a:solidFill>
-                        <a:srgbClr val="CCCCCC"/>
-                      </a:solidFill>
-                      <a:prstDash val="solid"/>
-                      <a:round/>
-                      <a:headEnd type="none" w="med" len="med"/>
-                      <a:tailEnd type="none" w="med" len="med"/>
-                    </a:lnB>
-                  </a:tcPr>
-                </a:tc>
-                <a:tc>
-                  <a:txBody>
-                    <a:bodyPr/>
-                    <a:lstStyle/>
-                    <a:p>
-                      <a:pPr rtl="0" fontAlgn="b"/>
-                      <a:r>
-                        <a:rPr lang="en-US" sz="1200" b="0">
-                          <a:effectLst/>
-                          <a:latin typeface="Calibri" panose="020F0502020204030204" pitchFamily="34" charset="0"/>
-                        </a:rPr>
-                        <a:t>Garrett Lawson</a:t>
-                      </a:r>
-                    </a:p>
-                  </a:txBody>
-                  <a:tcPr marL="28575" marR="28575" marT="19050" marB="19050" anchor="b">
-                    <a:lnL w="9525" cap="flat" cmpd="sng" algn="ctr">
-                      <a:solidFill>
-                        <a:srgbClr val="CCCCCC"/>
-                      </a:solidFill>
-                      <a:prstDash val="solid"/>
-                      <a:round/>
-                      <a:headEnd type="none" w="med" len="med"/>
-                      <a:tailEnd type="none" w="med" len="med"/>
-                    </a:lnL>
-                    <a:lnR w="9525" cap="flat" cmpd="sng" algn="ctr">
-                      <a:solidFill>
-                        <a:srgbClr val="CCCCCC"/>
-                      </a:solidFill>
-                      <a:prstDash val="solid"/>
-                      <a:round/>
-                      <a:headEnd type="none" w="med" len="med"/>
-                      <a:tailEnd type="none" w="med" len="med"/>
-                    </a:lnR>
-                    <a:lnT w="9525" cap="flat" cmpd="sng" algn="ctr">
-                      <a:solidFill>
-                        <a:srgbClr val="CCCCCC"/>
-                      </a:solidFill>
-                      <a:prstDash val="solid"/>
-                      <a:round/>
-                      <a:headEnd type="none" w="med" len="med"/>
-                      <a:tailEnd type="none" w="med" len="med"/>
-                    </a:lnT>
-                    <a:lnB w="9525" cap="flat" cmpd="sng" algn="ctr">
-                      <a:solidFill>
-                        <a:srgbClr val="CCCCCC"/>
-                      </a:solidFill>
-                      <a:prstDash val="solid"/>
-                      <a:round/>
-                      <a:headEnd type="none" w="med" len="med"/>
-                      <a:tailEnd type="none" w="med" len="med"/>
-                    </a:lnB>
-                  </a:tcPr>
-                </a:tc>
-                <a:tc>
-                  <a:txBody>
-                    <a:bodyPr/>
-                    <a:lstStyle/>
-                    <a:p>
-                      <a:pPr rtl="0" fontAlgn="b"/>
-                      <a:r>
-                        <a:rPr lang="en-US" sz="1200" b="0">
-                          <a:effectLst/>
-                          <a:latin typeface="Calibri" panose="020F0502020204030204" pitchFamily="34" charset="0"/>
-                        </a:rPr>
-                        <a:t>Brandon Crawford</a:t>
-                      </a:r>
-                    </a:p>
-                  </a:txBody>
-                  <a:tcPr marL="28575" marR="28575" marT="19050" marB="19050" anchor="b">
-                    <a:lnL w="9525" cap="flat" cmpd="sng" algn="ctr">
-                      <a:solidFill>
-                        <a:srgbClr val="CCCCCC"/>
-                      </a:solidFill>
-                      <a:prstDash val="solid"/>
-                      <a:round/>
-                      <a:headEnd type="none" w="med" len="med"/>
-                      <a:tailEnd type="none" w="med" len="med"/>
-                    </a:lnL>
-                    <a:lnR w="9525" cap="flat" cmpd="sng" algn="ctr">
-                      <a:solidFill>
-                        <a:srgbClr val="CCCCCC"/>
-                      </a:solidFill>
-                      <a:prstDash val="solid"/>
-                      <a:round/>
-                      <a:headEnd type="none" w="med" len="med"/>
-                      <a:tailEnd type="none" w="med" len="med"/>
-                    </a:lnR>
-                    <a:lnT w="9525" cap="flat" cmpd="sng" algn="ctr">
-                      <a:solidFill>
-                        <a:srgbClr val="CCCCCC"/>
-                      </a:solidFill>
-                      <a:prstDash val="solid"/>
-                      <a:round/>
-                      <a:headEnd type="none" w="med" len="med"/>
-                      <a:tailEnd type="none" w="med" len="med"/>
-                    </a:lnT>
-                    <a:lnB w="9525" cap="flat" cmpd="sng" algn="ctr">
-                      <a:solidFill>
-                        <a:srgbClr val="CCCCCC"/>
-                      </a:solidFill>
-                      <a:prstDash val="solid"/>
-                      <a:round/>
-                      <a:headEnd type="none" w="med" len="med"/>
-                      <a:tailEnd type="none" w="med" len="med"/>
-                    </a:lnB>
-                  </a:tcPr>
-                </a:tc>
-                <a:tc>
-                  <a:txBody>
-                    <a:bodyPr/>
-                    <a:lstStyle/>
-                    <a:p>
-                      <a:pPr rtl="0" fontAlgn="b"/>
-                      <a:r>
-                        <a:rPr lang="en-US" sz="1200" b="0">
-                          <a:effectLst/>
-                          <a:latin typeface="Calibri" panose="020F0502020204030204" pitchFamily="34" charset="0"/>
-                        </a:rPr>
-                        <a:t>Tom Hudson</a:t>
-                      </a:r>
-                    </a:p>
-                  </a:txBody>
-                  <a:tcPr marL="28575" marR="28575" marT="19050" marB="19050" anchor="b">
-                    <a:lnL w="9525" cap="flat" cmpd="sng" algn="ctr">
-                      <a:solidFill>
-                        <a:srgbClr val="CCCCCC"/>
-                      </a:solidFill>
-                      <a:prstDash val="solid"/>
-                      <a:round/>
-                      <a:headEnd type="none" w="med" len="med"/>
-                      <a:tailEnd type="none" w="med" len="med"/>
-                    </a:lnL>
-                    <a:lnR w="9525" cap="flat" cmpd="sng" algn="ctr">
-                      <a:solidFill>
-                        <a:srgbClr val="CCCCCC"/>
-                      </a:solidFill>
-                      <a:prstDash val="solid"/>
-                      <a:round/>
-                      <a:headEnd type="none" w="med" len="med"/>
-                      <a:tailEnd type="none" w="med" len="med"/>
-                    </a:lnR>
-                    <a:lnT w="9525" cap="flat" cmpd="sng" algn="ctr">
-                      <a:solidFill>
-                        <a:srgbClr val="CCCCCC"/>
-                      </a:solidFill>
-                      <a:prstDash val="solid"/>
-                      <a:round/>
-                      <a:headEnd type="none" w="med" len="med"/>
-                      <a:tailEnd type="none" w="med" len="med"/>
-                    </a:lnT>
-                    <a:lnB w="9525" cap="flat" cmpd="sng" algn="ctr">
-                      <a:solidFill>
-                        <a:srgbClr val="CCCCCC"/>
-                      </a:solidFill>
-                      <a:prstDash val="solid"/>
-                      <a:round/>
-                      <a:headEnd type="none" w="med" len="med"/>
-                      <a:tailEnd type="none" w="med" len="med"/>
-                    </a:lnB>
-                  </a:tcPr>
-                </a:tc>
-                <a:tc>
-                  <a:txBody>
-                    <a:bodyPr/>
-                    <a:lstStyle/>
-                    <a:p>
-                      <a:pPr rtl="0" fontAlgn="b"/>
-                      <a:endParaRPr lang="en-US">
-                        <a:effectLst/>
-                      </a:endParaRPr>
-                    </a:p>
-                  </a:txBody>
-                  <a:tcPr marL="28575" marR="28575" marT="19050" marB="19050" anchor="b">
-                    <a:lnL w="9525" cap="flat" cmpd="sng" algn="ctr">
-                      <a:solidFill>
-                        <a:srgbClr val="CCCCCC"/>
-                      </a:solidFill>
-                      <a:prstDash val="solid"/>
-                      <a:round/>
-                      <a:headEnd type="none" w="med" len="med"/>
-                      <a:tailEnd type="none" w="med" len="med"/>
-                    </a:lnL>
-                    <a:lnR w="9525" cap="flat" cmpd="sng" algn="ctr">
-                      <a:solidFill>
-                        <a:srgbClr val="CCCCCC"/>
-                      </a:solidFill>
-                      <a:prstDash val="solid"/>
-                      <a:round/>
-                      <a:headEnd type="none" w="med" len="med"/>
-                      <a:tailEnd type="none" w="med" len="med"/>
-                    </a:lnR>
-                    <a:lnT w="9525" cap="flat" cmpd="sng" algn="ctr">
-                      <a:solidFill>
-                        <a:srgbClr val="CCCCCC"/>
-                      </a:solidFill>
-                      <a:prstDash val="solid"/>
-                      <a:round/>
-                      <a:headEnd type="none" w="med" len="med"/>
-                      <a:tailEnd type="none" w="med" len="med"/>
-                    </a:lnT>
-                    <a:lnB w="9525" cap="flat" cmpd="sng" algn="ctr">
-                      <a:solidFill>
-                        <a:srgbClr val="CCCCCC"/>
-                      </a:solidFill>
-                      <a:prstDash val="solid"/>
-                      <a:round/>
-                      <a:headEnd type="none" w="med" len="med"/>
-                      <a:tailEnd type="none" w="med" len="med"/>
-                    </a:lnB>
-                  </a:tcPr>
-                </a:tc>
-                <a:extLst>
-                  <a:ext uri="{0D108BD9-81ED-4DB2-BD59-A6C34878D82A}">
-                    <a16:rowId xmlns:a16="http://schemas.microsoft.com/office/drawing/2014/main" val="2963683593"/>
-                  </a:ext>
-                </a:extLst>
-              </a:tr>
-              <a:tr h="200025">
-                <a:tc>
-                  <a:txBody>
-                    <a:bodyPr/>
-                    <a:lstStyle/>
-                    <a:p>
-                      <a:pPr algn="r" rtl="0" fontAlgn="b"/>
-                      <a:r>
-                        <a:rPr lang="en-US" sz="1200" b="0">
-                          <a:effectLst/>
-                          <a:latin typeface="Calibri" panose="020F0502020204030204" pitchFamily="34" charset="0"/>
-                        </a:rPr>
-                        <a:t>18-Apr</a:t>
-                      </a:r>
-                    </a:p>
-                  </a:txBody>
-                  <a:tcPr marL="28575" marR="28575" marT="19050" marB="19050" anchor="b">
-                    <a:lnL w="9525" cap="flat" cmpd="sng" algn="ctr">
-                      <a:solidFill>
-                        <a:srgbClr val="CCCCCC"/>
-                      </a:solidFill>
-                      <a:prstDash val="solid"/>
-                      <a:round/>
-                      <a:headEnd type="none" w="med" len="med"/>
-                      <a:tailEnd type="none" w="med" len="med"/>
-                    </a:lnL>
-                    <a:lnR w="9525" cap="flat" cmpd="sng" algn="ctr">
-                      <a:solidFill>
-                        <a:srgbClr val="CCCCCC"/>
-                      </a:solidFill>
-                      <a:prstDash val="solid"/>
-                      <a:round/>
-                      <a:headEnd type="none" w="med" len="med"/>
-                      <a:tailEnd type="none" w="med" len="med"/>
-                    </a:lnR>
-                    <a:lnT w="9525" cap="flat" cmpd="sng" algn="ctr">
-                      <a:solidFill>
-                        <a:srgbClr val="CCCCCC"/>
-                      </a:solidFill>
-                      <a:prstDash val="solid"/>
-                      <a:round/>
-                      <a:headEnd type="none" w="med" len="med"/>
-                      <a:tailEnd type="none" w="med" len="med"/>
-                    </a:lnT>
-                    <a:lnB w="9525" cap="flat" cmpd="sng" algn="ctr">
-                      <a:solidFill>
-                        <a:srgbClr val="CCCCCC"/>
-                      </a:solidFill>
-                      <a:prstDash val="solid"/>
-                      <a:round/>
-                      <a:headEnd type="none" w="med" len="med"/>
-                      <a:tailEnd type="none" w="med" len="med"/>
-                    </a:lnB>
-                  </a:tcPr>
-                </a:tc>
-                <a:tc>
-                  <a:txBody>
-                    <a:bodyPr/>
-                    <a:lstStyle/>
-                    <a:p>
-                      <a:pPr rtl="0" fontAlgn="b"/>
-                      <a:r>
-                        <a:rPr lang="en-US" sz="1200" b="0">
-                          <a:effectLst/>
-                          <a:latin typeface="Calibri" panose="020F0502020204030204" pitchFamily="34" charset="0"/>
-                        </a:rPr>
-                        <a:t>Mychala Snead</a:t>
-                      </a:r>
-                    </a:p>
-                  </a:txBody>
-                  <a:tcPr marL="28575" marR="28575" marT="19050" marB="19050" anchor="b">
-                    <a:lnL w="9525" cap="flat" cmpd="sng" algn="ctr">
-                      <a:solidFill>
-                        <a:srgbClr val="CCCCCC"/>
-                      </a:solidFill>
-                      <a:prstDash val="solid"/>
-                      <a:round/>
-                      <a:headEnd type="none" w="med" len="med"/>
-                      <a:tailEnd type="none" w="med" len="med"/>
-                    </a:lnL>
-                    <a:lnR w="9525" cap="flat" cmpd="sng" algn="ctr">
-                      <a:solidFill>
-                        <a:srgbClr val="CCCCCC"/>
-                      </a:solidFill>
-                      <a:prstDash val="solid"/>
-                      <a:round/>
-                      <a:headEnd type="none" w="med" len="med"/>
-                      <a:tailEnd type="none" w="med" len="med"/>
-                    </a:lnR>
-                    <a:lnT w="9525" cap="flat" cmpd="sng" algn="ctr">
-                      <a:solidFill>
-                        <a:srgbClr val="CCCCCC"/>
-                      </a:solidFill>
-                      <a:prstDash val="solid"/>
-                      <a:round/>
-                      <a:headEnd type="none" w="med" len="med"/>
-                      <a:tailEnd type="none" w="med" len="med"/>
-                    </a:lnT>
-                    <a:lnB w="9525" cap="flat" cmpd="sng" algn="ctr">
-                      <a:solidFill>
-                        <a:srgbClr val="CCCCCC"/>
-                      </a:solidFill>
-                      <a:prstDash val="solid"/>
-                      <a:round/>
-                      <a:headEnd type="none" w="med" len="med"/>
-                      <a:tailEnd type="none" w="med" len="med"/>
-                    </a:lnB>
-                  </a:tcPr>
-                </a:tc>
-                <a:tc>
-                  <a:txBody>
-                    <a:bodyPr/>
-                    <a:lstStyle/>
-                    <a:p>
-                      <a:pPr rtl="0" fontAlgn="b"/>
-                      <a:r>
-                        <a:rPr lang="en-US" sz="1200" b="0">
-                          <a:effectLst/>
-                          <a:latin typeface="Calibri" panose="020F0502020204030204" pitchFamily="34" charset="0"/>
-                        </a:rPr>
-                        <a:t>Riley Meyers</a:t>
-                      </a:r>
-                    </a:p>
-                  </a:txBody>
-                  <a:tcPr marL="28575" marR="28575" marT="19050" marB="19050" anchor="b">
-                    <a:lnL w="9525" cap="flat" cmpd="sng" algn="ctr">
-                      <a:solidFill>
-                        <a:srgbClr val="CCCCCC"/>
-                      </a:solidFill>
-                      <a:prstDash val="solid"/>
-                      <a:round/>
-                      <a:headEnd type="none" w="med" len="med"/>
-                      <a:tailEnd type="none" w="med" len="med"/>
-                    </a:lnL>
-                    <a:lnR w="9525" cap="flat" cmpd="sng" algn="ctr">
-                      <a:solidFill>
-                        <a:srgbClr val="CCCCCC"/>
-                      </a:solidFill>
-                      <a:prstDash val="solid"/>
-                      <a:round/>
-                      <a:headEnd type="none" w="med" len="med"/>
-                      <a:tailEnd type="none" w="med" len="med"/>
-                    </a:lnR>
-                    <a:lnT w="9525" cap="flat" cmpd="sng" algn="ctr">
-                      <a:solidFill>
-                        <a:srgbClr val="CCCCCC"/>
-                      </a:solidFill>
-                      <a:prstDash val="solid"/>
-                      <a:round/>
-                      <a:headEnd type="none" w="med" len="med"/>
-                      <a:tailEnd type="none" w="med" len="med"/>
-                    </a:lnT>
-                    <a:lnB w="9525" cap="flat" cmpd="sng" algn="ctr">
-                      <a:solidFill>
-                        <a:srgbClr val="CCCCCC"/>
-                      </a:solidFill>
-                      <a:prstDash val="solid"/>
-                      <a:round/>
-                      <a:headEnd type="none" w="med" len="med"/>
-                      <a:tailEnd type="none" w="med" len="med"/>
-                    </a:lnB>
-                  </a:tcPr>
-                </a:tc>
-                <a:tc>
-                  <a:txBody>
-                    <a:bodyPr/>
-                    <a:lstStyle/>
-                    <a:p>
-                      <a:pPr rtl="0" fontAlgn="b"/>
-                      <a:r>
-                        <a:rPr lang="en-US" sz="1200" b="0">
-                          <a:effectLst/>
-                          <a:latin typeface="Calibri" panose="020F0502020204030204" pitchFamily="34" charset="0"/>
-                        </a:rPr>
-                        <a:t>Caylen Wolfer</a:t>
-                      </a:r>
-                    </a:p>
-                  </a:txBody>
-                  <a:tcPr marL="28575" marR="28575" marT="19050" marB="19050" anchor="b">
-                    <a:lnL w="9525" cap="flat" cmpd="sng" algn="ctr">
-                      <a:solidFill>
-                        <a:srgbClr val="CCCCCC"/>
-                      </a:solidFill>
-                      <a:prstDash val="solid"/>
-                      <a:round/>
-                      <a:headEnd type="none" w="med" len="med"/>
-                      <a:tailEnd type="none" w="med" len="med"/>
-                    </a:lnL>
-                    <a:lnR w="9525" cap="flat" cmpd="sng" algn="ctr">
-                      <a:solidFill>
-                        <a:srgbClr val="CCCCCC"/>
-                      </a:solidFill>
-                      <a:prstDash val="solid"/>
-                      <a:round/>
-                      <a:headEnd type="none" w="med" len="med"/>
-                      <a:tailEnd type="none" w="med" len="med"/>
-                    </a:lnR>
-                    <a:lnT w="9525" cap="flat" cmpd="sng" algn="ctr">
-                      <a:solidFill>
-                        <a:srgbClr val="CCCCCC"/>
-                      </a:solidFill>
-                      <a:prstDash val="solid"/>
-                      <a:round/>
-                      <a:headEnd type="none" w="med" len="med"/>
-                      <a:tailEnd type="none" w="med" len="med"/>
-                    </a:lnT>
-                    <a:lnB w="9525" cap="flat" cmpd="sng" algn="ctr">
-                      <a:solidFill>
-                        <a:srgbClr val="CCCCCC"/>
-                      </a:solidFill>
-                      <a:prstDash val="solid"/>
-                      <a:round/>
-                      <a:headEnd type="none" w="med" len="med"/>
-                      <a:tailEnd type="none" w="med" len="med"/>
-                    </a:lnB>
-                  </a:tcPr>
-                </a:tc>
-                <a:tc>
-                  <a:txBody>
-                    <a:bodyPr/>
-                    <a:lstStyle/>
-                    <a:p>
-                      <a:pPr rtl="0" fontAlgn="b"/>
-                      <a:r>
-                        <a:rPr lang="en-US" sz="1200" b="0">
-                          <a:effectLst/>
-                          <a:latin typeface="Calibri" panose="020F0502020204030204" pitchFamily="34" charset="0"/>
-                        </a:rPr>
-                        <a:t>Gretel Baur</a:t>
-                      </a:r>
-                    </a:p>
-                  </a:txBody>
-                  <a:tcPr marL="28575" marR="28575" marT="19050" marB="19050" anchor="b">
-                    <a:lnL w="9525" cap="flat" cmpd="sng" algn="ctr">
-                      <a:solidFill>
-                        <a:srgbClr val="CCCCCC"/>
-                      </a:solidFill>
-                      <a:prstDash val="solid"/>
-                      <a:round/>
-                      <a:headEnd type="none" w="med" len="med"/>
-                      <a:tailEnd type="none" w="med" len="med"/>
-                    </a:lnL>
-                    <a:lnR w="9525" cap="flat" cmpd="sng" algn="ctr">
-                      <a:solidFill>
-                        <a:srgbClr val="CCCCCC"/>
-                      </a:solidFill>
-                      <a:prstDash val="solid"/>
-                      <a:round/>
-                      <a:headEnd type="none" w="med" len="med"/>
-                      <a:tailEnd type="none" w="med" len="med"/>
-                    </a:lnR>
-                    <a:lnT w="9525" cap="flat" cmpd="sng" algn="ctr">
-                      <a:solidFill>
-                        <a:srgbClr val="CCCCCC"/>
-                      </a:solidFill>
-                      <a:prstDash val="solid"/>
-                      <a:round/>
-                      <a:headEnd type="none" w="med" len="med"/>
-                      <a:tailEnd type="none" w="med" len="med"/>
-                    </a:lnT>
-                    <a:lnB w="9525" cap="flat" cmpd="sng" algn="ctr">
-                      <a:solidFill>
-                        <a:srgbClr val="CCCCCC"/>
-                      </a:solidFill>
-                      <a:prstDash val="solid"/>
-                      <a:round/>
-                      <a:headEnd type="none" w="med" len="med"/>
-                      <a:tailEnd type="none" w="med" len="med"/>
-                    </a:lnB>
-                  </a:tcPr>
-                </a:tc>
-                <a:tc>
-                  <a:txBody>
-                    <a:bodyPr/>
-                    <a:lstStyle/>
-                    <a:p>
-                      <a:pPr rtl="0" fontAlgn="b"/>
-                      <a:r>
-                        <a:rPr lang="en-US">
-                          <a:effectLst/>
-                        </a:rPr>
-                        <a:t>Tanner Ray Humbert</a:t>
-                      </a:r>
-                    </a:p>
-                  </a:txBody>
-                  <a:tcPr marL="28575" marR="28575" marT="19050" marB="19050" anchor="b">
-                    <a:lnL w="9525" cap="flat" cmpd="sng" algn="ctr">
-                      <a:solidFill>
-                        <a:srgbClr val="CCCCCC"/>
-                      </a:solidFill>
-                      <a:prstDash val="solid"/>
-                      <a:round/>
-                      <a:headEnd type="none" w="med" len="med"/>
-                      <a:tailEnd type="none" w="med" len="med"/>
-                    </a:lnL>
-                    <a:lnR w="9525" cap="flat" cmpd="sng" algn="ctr">
-                      <a:solidFill>
-                        <a:srgbClr val="CCCCCC"/>
-                      </a:solidFill>
-                      <a:prstDash val="solid"/>
-                      <a:round/>
-                      <a:headEnd type="none" w="med" len="med"/>
-                      <a:tailEnd type="none" w="med" len="med"/>
-                    </a:lnR>
-                    <a:lnT w="9525" cap="flat" cmpd="sng" algn="ctr">
-                      <a:solidFill>
-                        <a:srgbClr val="CCCCCC"/>
-                      </a:solidFill>
-                      <a:prstDash val="solid"/>
-                      <a:round/>
-                      <a:headEnd type="none" w="med" len="med"/>
-                      <a:tailEnd type="none" w="med" len="med"/>
-                    </a:lnT>
-                    <a:lnB w="9525" cap="flat" cmpd="sng" algn="ctr">
-                      <a:solidFill>
-                        <a:srgbClr val="CCCCCC"/>
-                      </a:solidFill>
-                      <a:prstDash val="solid"/>
-                      <a:round/>
-                      <a:headEnd type="none" w="med" len="med"/>
-                      <a:tailEnd type="none" w="med" len="med"/>
-                    </a:lnB>
-                  </a:tcPr>
-                </a:tc>
-                <a:extLst>
-                  <a:ext uri="{0D108BD9-81ED-4DB2-BD59-A6C34878D82A}">
-                    <a16:rowId xmlns:a16="http://schemas.microsoft.com/office/drawing/2014/main" val="919281677"/>
-                  </a:ext>
-                </a:extLst>
-              </a:tr>
-              <a:tr h="200025">
-                <a:tc>
-                  <a:txBody>
-                    <a:bodyPr/>
-                    <a:lstStyle/>
-                    <a:p>
-                      <a:pPr algn="r" rtl="0" fontAlgn="b"/>
-                      <a:r>
-                        <a:rPr lang="en-US" sz="1200" b="0">
-                          <a:effectLst/>
-                          <a:latin typeface="Calibri" panose="020F0502020204030204" pitchFamily="34" charset="0"/>
-                        </a:rPr>
-                        <a:t>23-Apr</a:t>
-                      </a:r>
-                    </a:p>
-                  </a:txBody>
-                  <a:tcPr marL="28575" marR="28575" marT="19050" marB="19050" anchor="b">
-                    <a:lnL w="9525" cap="flat" cmpd="sng" algn="ctr">
-                      <a:solidFill>
-                        <a:srgbClr val="CCCCCC"/>
-                      </a:solidFill>
-                      <a:prstDash val="solid"/>
-                      <a:round/>
-                      <a:headEnd type="none" w="med" len="med"/>
-                      <a:tailEnd type="none" w="med" len="med"/>
-                    </a:lnL>
-                    <a:lnR w="9525" cap="flat" cmpd="sng" algn="ctr">
-                      <a:solidFill>
-                        <a:srgbClr val="CCCCCC"/>
-                      </a:solidFill>
-                      <a:prstDash val="solid"/>
-                      <a:round/>
-                      <a:headEnd type="none" w="med" len="med"/>
-                      <a:tailEnd type="none" w="med" len="med"/>
-                    </a:lnR>
-                    <a:lnT w="9525" cap="flat" cmpd="sng" algn="ctr">
-                      <a:solidFill>
-                        <a:srgbClr val="CCCCCC"/>
-                      </a:solidFill>
-                      <a:prstDash val="solid"/>
-                      <a:round/>
-                      <a:headEnd type="none" w="med" len="med"/>
-                      <a:tailEnd type="none" w="med" len="med"/>
-                    </a:lnT>
-                    <a:lnB w="9525" cap="flat" cmpd="sng" algn="ctr">
-                      <a:solidFill>
-                        <a:srgbClr val="CCCCCC"/>
-                      </a:solidFill>
-                      <a:prstDash val="solid"/>
-                      <a:round/>
-                      <a:headEnd type="none" w="med" len="med"/>
-                      <a:tailEnd type="none" w="med" len="med"/>
-                    </a:lnB>
-                  </a:tcPr>
-                </a:tc>
-                <a:tc>
-                  <a:txBody>
-                    <a:bodyPr/>
-                    <a:lstStyle/>
-                    <a:p>
-                      <a:pPr rtl="0" fontAlgn="b"/>
-                      <a:r>
-                        <a:rPr lang="en-US" sz="1200" b="0">
-                          <a:effectLst/>
-                          <a:latin typeface="Calibri" panose="020F0502020204030204" pitchFamily="34" charset="0"/>
-                        </a:rPr>
-                        <a:t>Austin Holloway</a:t>
-                      </a:r>
-                    </a:p>
-                  </a:txBody>
-                  <a:tcPr marL="28575" marR="28575" marT="19050" marB="19050" anchor="b">
-                    <a:lnL w="9525" cap="flat" cmpd="sng" algn="ctr">
-                      <a:solidFill>
-                        <a:srgbClr val="CCCCCC"/>
-                      </a:solidFill>
-                      <a:prstDash val="solid"/>
-                      <a:round/>
-                      <a:headEnd type="none" w="med" len="med"/>
-                      <a:tailEnd type="none" w="med" len="med"/>
-                    </a:lnL>
-                    <a:lnR w="9525" cap="flat" cmpd="sng" algn="ctr">
-                      <a:solidFill>
-                        <a:srgbClr val="CCCCCC"/>
-                      </a:solidFill>
-                      <a:prstDash val="solid"/>
-                      <a:round/>
-                      <a:headEnd type="none" w="med" len="med"/>
-                      <a:tailEnd type="none" w="med" len="med"/>
-                    </a:lnR>
-                    <a:lnT w="9525" cap="flat" cmpd="sng" algn="ctr">
-                      <a:solidFill>
-                        <a:srgbClr val="CCCCCC"/>
-                      </a:solidFill>
-                      <a:prstDash val="solid"/>
-                      <a:round/>
-                      <a:headEnd type="none" w="med" len="med"/>
-                      <a:tailEnd type="none" w="med" len="med"/>
-                    </a:lnT>
-                    <a:lnB w="9525" cap="flat" cmpd="sng" algn="ctr">
-                      <a:solidFill>
-                        <a:srgbClr val="CCCCCC"/>
-                      </a:solidFill>
-                      <a:prstDash val="solid"/>
-                      <a:round/>
-                      <a:headEnd type="none" w="med" len="med"/>
-                      <a:tailEnd type="none" w="med" len="med"/>
-                    </a:lnB>
-                  </a:tcPr>
-                </a:tc>
-                <a:tc>
-                  <a:txBody>
-                    <a:bodyPr/>
-                    <a:lstStyle/>
-                    <a:p>
-                      <a:pPr rtl="0" fontAlgn="b"/>
-                      <a:r>
-                        <a:rPr lang="en-US" sz="1200" b="0">
-                          <a:effectLst/>
-                          <a:latin typeface="Calibri" panose="020F0502020204030204" pitchFamily="34" charset="0"/>
-                        </a:rPr>
-                        <a:t>Kelley Sinning</a:t>
-                      </a:r>
-                    </a:p>
-                  </a:txBody>
-                  <a:tcPr marL="28575" marR="28575" marT="19050" marB="19050" anchor="b">
-                    <a:lnL w="9525" cap="flat" cmpd="sng" algn="ctr">
-                      <a:solidFill>
-                        <a:srgbClr val="CCCCCC"/>
-                      </a:solidFill>
-                      <a:prstDash val="solid"/>
-                      <a:round/>
-                      <a:headEnd type="none" w="med" len="med"/>
-                      <a:tailEnd type="none" w="med" len="med"/>
-                    </a:lnL>
-                    <a:lnR w="9525" cap="flat" cmpd="sng" algn="ctr">
-                      <a:solidFill>
-                        <a:srgbClr val="CCCCCC"/>
-                      </a:solidFill>
-                      <a:prstDash val="solid"/>
-                      <a:round/>
-                      <a:headEnd type="none" w="med" len="med"/>
-                      <a:tailEnd type="none" w="med" len="med"/>
-                    </a:lnR>
-                    <a:lnT w="9525" cap="flat" cmpd="sng" algn="ctr">
-                      <a:solidFill>
-                        <a:srgbClr val="CCCCCC"/>
-                      </a:solidFill>
-                      <a:prstDash val="solid"/>
-                      <a:round/>
-                      <a:headEnd type="none" w="med" len="med"/>
-                      <a:tailEnd type="none" w="med" len="med"/>
-                    </a:lnT>
-                    <a:lnB w="9525" cap="flat" cmpd="sng" algn="ctr">
-                      <a:solidFill>
-                        <a:srgbClr val="CCCCCC"/>
-                      </a:solidFill>
-                      <a:prstDash val="solid"/>
-                      <a:round/>
-                      <a:headEnd type="none" w="med" len="med"/>
-                      <a:tailEnd type="none" w="med" len="med"/>
-                    </a:lnB>
-                  </a:tcPr>
-                </a:tc>
-                <a:tc>
-                  <a:txBody>
-                    <a:bodyPr/>
-                    <a:lstStyle/>
-                    <a:p>
-                      <a:pPr rtl="0" fontAlgn="b"/>
-                      <a:r>
-                        <a:rPr lang="en-US" sz="1200" b="0">
-                          <a:effectLst/>
-                          <a:latin typeface="Calibri" panose="020F0502020204030204" pitchFamily="34" charset="0"/>
-                        </a:rPr>
-                        <a:t>Meredith Snyder</a:t>
-                      </a:r>
-                    </a:p>
-                  </a:txBody>
-                  <a:tcPr marL="28575" marR="28575" marT="19050" marB="19050" anchor="b">
-                    <a:lnL w="9525" cap="flat" cmpd="sng" algn="ctr">
-                      <a:solidFill>
-                        <a:srgbClr val="CCCCCC"/>
-                      </a:solidFill>
-                      <a:prstDash val="solid"/>
-                      <a:round/>
-                      <a:headEnd type="none" w="med" len="med"/>
-                      <a:tailEnd type="none" w="med" len="med"/>
-                    </a:lnL>
-                    <a:lnR w="9525" cap="flat" cmpd="sng" algn="ctr">
-                      <a:solidFill>
-                        <a:srgbClr val="CCCCCC"/>
-                      </a:solidFill>
-                      <a:prstDash val="solid"/>
-                      <a:round/>
-                      <a:headEnd type="none" w="med" len="med"/>
-                      <a:tailEnd type="none" w="med" len="med"/>
-                    </a:lnR>
-                    <a:lnT w="9525" cap="flat" cmpd="sng" algn="ctr">
-                      <a:solidFill>
-                        <a:srgbClr val="CCCCCC"/>
-                      </a:solidFill>
-                      <a:prstDash val="solid"/>
-                      <a:round/>
-                      <a:headEnd type="none" w="med" len="med"/>
-                      <a:tailEnd type="none" w="med" len="med"/>
-                    </a:lnT>
-                    <a:lnB w="9525" cap="flat" cmpd="sng" algn="ctr">
-                      <a:solidFill>
-                        <a:srgbClr val="CCCCCC"/>
-                      </a:solidFill>
-                      <a:prstDash val="solid"/>
-                      <a:round/>
-                      <a:headEnd type="none" w="med" len="med"/>
-                      <a:tailEnd type="none" w="med" len="med"/>
-                    </a:lnB>
-                  </a:tcPr>
-                </a:tc>
-                <a:tc>
-                  <a:txBody>
-                    <a:bodyPr/>
-                    <a:lstStyle/>
-                    <a:p>
-                      <a:pPr rtl="0" fontAlgn="b"/>
-                      <a:r>
-                        <a:rPr lang="en-US" sz="1200" b="0">
-                          <a:effectLst/>
-                          <a:latin typeface="Calibri" panose="020F0502020204030204" pitchFamily="34" charset="0"/>
-                        </a:rPr>
-                        <a:t>Elizabeth Sicking</a:t>
-                      </a:r>
-                    </a:p>
-                  </a:txBody>
-                  <a:tcPr marL="28575" marR="28575" marT="19050" marB="19050" anchor="b">
-                    <a:lnL w="9525" cap="flat" cmpd="sng" algn="ctr">
-                      <a:solidFill>
-                        <a:srgbClr val="CCCCCC"/>
-                      </a:solidFill>
-                      <a:prstDash val="solid"/>
-                      <a:round/>
-                      <a:headEnd type="none" w="med" len="med"/>
-                      <a:tailEnd type="none" w="med" len="med"/>
-                    </a:lnL>
-                    <a:lnR w="9525" cap="flat" cmpd="sng" algn="ctr">
-                      <a:solidFill>
-                        <a:srgbClr val="CCCCCC"/>
-                      </a:solidFill>
-                      <a:prstDash val="solid"/>
-                      <a:round/>
-                      <a:headEnd type="none" w="med" len="med"/>
-                      <a:tailEnd type="none" w="med" len="med"/>
-                    </a:lnR>
-                    <a:lnT w="9525" cap="flat" cmpd="sng" algn="ctr">
-                      <a:solidFill>
-                        <a:srgbClr val="CCCCCC"/>
-                      </a:solidFill>
-                      <a:prstDash val="solid"/>
-                      <a:round/>
-                      <a:headEnd type="none" w="med" len="med"/>
-                      <a:tailEnd type="none" w="med" len="med"/>
-                    </a:lnT>
-                    <a:lnB w="9525" cap="flat" cmpd="sng" algn="ctr">
-                      <a:solidFill>
-                        <a:srgbClr val="CCCCCC"/>
-                      </a:solidFill>
-                      <a:prstDash val="solid"/>
-                      <a:round/>
-                      <a:headEnd type="none" w="med" len="med"/>
-                      <a:tailEnd type="none" w="med" len="med"/>
-                    </a:lnB>
-                  </a:tcPr>
-                </a:tc>
-                <a:tc>
-                  <a:txBody>
-                    <a:bodyPr/>
-                    <a:lstStyle/>
-                    <a:p>
-                      <a:pPr rtl="0" fontAlgn="b"/>
-                      <a:r>
-                        <a:rPr lang="en-US">
-                          <a:effectLst/>
-                        </a:rPr>
-                        <a:t>Abir Jain</a:t>
-                      </a:r>
-                    </a:p>
-                  </a:txBody>
-                  <a:tcPr marL="28575" marR="28575" marT="19050" marB="19050" anchor="b">
-                    <a:lnL w="9525" cap="flat" cmpd="sng" algn="ctr">
-                      <a:solidFill>
-                        <a:srgbClr val="CCCCCC"/>
-                      </a:solidFill>
-                      <a:prstDash val="solid"/>
-                      <a:round/>
-                      <a:headEnd type="none" w="med" len="med"/>
-                      <a:tailEnd type="none" w="med" len="med"/>
-                    </a:lnL>
-                    <a:lnR w="9525" cap="flat" cmpd="sng" algn="ctr">
-                      <a:solidFill>
-                        <a:srgbClr val="CCCCCC"/>
-                      </a:solidFill>
-                      <a:prstDash val="solid"/>
-                      <a:round/>
-                      <a:headEnd type="none" w="med" len="med"/>
-                      <a:tailEnd type="none" w="med" len="med"/>
-                    </a:lnR>
-                    <a:lnT w="9525" cap="flat" cmpd="sng" algn="ctr">
-                      <a:solidFill>
-                        <a:srgbClr val="CCCCCC"/>
-                      </a:solidFill>
-                      <a:prstDash val="solid"/>
-                      <a:round/>
-                      <a:headEnd type="none" w="med" len="med"/>
-                      <a:tailEnd type="none" w="med" len="med"/>
-                    </a:lnT>
-                    <a:lnB w="9525" cap="flat" cmpd="sng" algn="ctr">
-                      <a:solidFill>
-                        <a:srgbClr val="CCCCCC"/>
-                      </a:solidFill>
-                      <a:prstDash val="solid"/>
-                      <a:round/>
-                      <a:headEnd type="none" w="med" len="med"/>
-                      <a:tailEnd type="none" w="med" len="med"/>
-                    </a:lnB>
-                    <a:solidFill>
-                      <a:srgbClr val="FFFFFF"/>
-                    </a:solidFill>
-                  </a:tcPr>
-                </a:tc>
-                <a:extLst>
-                  <a:ext uri="{0D108BD9-81ED-4DB2-BD59-A6C34878D82A}">
-                    <a16:rowId xmlns:a16="http://schemas.microsoft.com/office/drawing/2014/main" val="1218201976"/>
-                  </a:ext>
-                </a:extLst>
-              </a:tr>
-              <a:tr h="200025">
-                <a:tc>
-                  <a:txBody>
-                    <a:bodyPr/>
-                    <a:lstStyle/>
-                    <a:p>
-                      <a:pPr algn="r" rtl="0" fontAlgn="b"/>
-                      <a:r>
-                        <a:rPr lang="en-US" sz="1200" b="0">
-                          <a:effectLst/>
-                          <a:latin typeface="Calibri" panose="020F0502020204030204" pitchFamily="34" charset="0"/>
-                        </a:rPr>
-                        <a:t>25-Apr</a:t>
-                      </a:r>
-                    </a:p>
-                  </a:txBody>
-                  <a:tcPr marL="28575" marR="28575" marT="19050" marB="19050" anchor="b">
-                    <a:lnL w="9525" cap="flat" cmpd="sng" algn="ctr">
-                      <a:solidFill>
-                        <a:srgbClr val="CCCCCC"/>
-                      </a:solidFill>
-                      <a:prstDash val="solid"/>
-                      <a:round/>
-                      <a:headEnd type="none" w="med" len="med"/>
-                      <a:tailEnd type="none" w="med" len="med"/>
-                    </a:lnL>
-                    <a:lnR w="9525" cap="flat" cmpd="sng" algn="ctr">
-                      <a:solidFill>
-                        <a:srgbClr val="CCCCCC"/>
-                      </a:solidFill>
-                      <a:prstDash val="solid"/>
-                      <a:round/>
-                      <a:headEnd type="none" w="med" len="med"/>
-                      <a:tailEnd type="none" w="med" len="med"/>
-                    </a:lnR>
-                    <a:lnT w="9525" cap="flat" cmpd="sng" algn="ctr">
-                      <a:solidFill>
-                        <a:srgbClr val="CCCCCC"/>
-                      </a:solidFill>
-                      <a:prstDash val="solid"/>
-                      <a:round/>
-                      <a:headEnd type="none" w="med" len="med"/>
-                      <a:tailEnd type="none" w="med" len="med"/>
-                    </a:lnT>
-                    <a:lnB w="9525" cap="flat" cmpd="sng" algn="ctr">
-                      <a:solidFill>
-                        <a:srgbClr val="CCCCCC"/>
-                      </a:solidFill>
-                      <a:prstDash val="solid"/>
-                      <a:round/>
-                      <a:headEnd type="none" w="med" len="med"/>
-                      <a:tailEnd type="none" w="med" len="med"/>
-                    </a:lnB>
-                  </a:tcPr>
-                </a:tc>
-                <a:tc>
-                  <a:txBody>
-                    <a:bodyPr/>
-                    <a:lstStyle/>
-                    <a:p>
-                      <a:pPr rtl="0" fontAlgn="b"/>
-                      <a:r>
-                        <a:rPr lang="en-US" sz="1200" b="0">
-                          <a:effectLst/>
-                          <a:latin typeface="Calibri" panose="020F0502020204030204" pitchFamily="34" charset="0"/>
-                        </a:rPr>
-                        <a:t>Bibek</a:t>
-                      </a:r>
-                    </a:p>
-                  </a:txBody>
-                  <a:tcPr marL="28575" marR="28575" marT="19050" marB="19050" anchor="b">
-                    <a:lnL w="9525" cap="flat" cmpd="sng" algn="ctr">
-                      <a:solidFill>
-                        <a:srgbClr val="CCCCCC"/>
-                      </a:solidFill>
-                      <a:prstDash val="solid"/>
-                      <a:round/>
-                      <a:headEnd type="none" w="med" len="med"/>
-                      <a:tailEnd type="none" w="med" len="med"/>
-                    </a:lnL>
-                    <a:lnR w="9525" cap="flat" cmpd="sng" algn="ctr">
-                      <a:solidFill>
-                        <a:srgbClr val="CCCCCC"/>
-                      </a:solidFill>
-                      <a:prstDash val="solid"/>
-                      <a:round/>
-                      <a:headEnd type="none" w="med" len="med"/>
-                      <a:tailEnd type="none" w="med" len="med"/>
-                    </a:lnR>
-                    <a:lnT w="9525" cap="flat" cmpd="sng" algn="ctr">
-                      <a:solidFill>
-                        <a:srgbClr val="CCCCCC"/>
-                      </a:solidFill>
-                      <a:prstDash val="solid"/>
-                      <a:round/>
-                      <a:headEnd type="none" w="med" len="med"/>
-                      <a:tailEnd type="none" w="med" len="med"/>
-                    </a:lnT>
-                    <a:lnB w="9525" cap="flat" cmpd="sng" algn="ctr">
-                      <a:solidFill>
-                        <a:srgbClr val="CCCCCC"/>
-                      </a:solidFill>
-                      <a:prstDash val="solid"/>
-                      <a:round/>
-                      <a:headEnd type="none" w="med" len="med"/>
-                      <a:tailEnd type="none" w="med" len="med"/>
-                    </a:lnB>
-                  </a:tcPr>
-                </a:tc>
-                <a:tc>
-                  <a:txBody>
-                    <a:bodyPr/>
-                    <a:lstStyle/>
-                    <a:p>
-                      <a:pPr rtl="0" fontAlgn="b"/>
-                      <a:r>
-                        <a:rPr lang="en-US" sz="1200" b="0">
-                          <a:effectLst/>
-                          <a:latin typeface="Calibri" panose="020F0502020204030204" pitchFamily="34" charset="0"/>
-                        </a:rPr>
-                        <a:t>Dan Watson</a:t>
-                      </a:r>
-                    </a:p>
-                  </a:txBody>
-                  <a:tcPr marL="28575" marR="28575" marT="19050" marB="19050" anchor="b">
-                    <a:lnL w="9525" cap="flat" cmpd="sng" algn="ctr">
-                      <a:solidFill>
-                        <a:srgbClr val="CCCCCC"/>
-                      </a:solidFill>
-                      <a:prstDash val="solid"/>
-                      <a:round/>
-                      <a:headEnd type="none" w="med" len="med"/>
-                      <a:tailEnd type="none" w="med" len="med"/>
-                    </a:lnL>
-                    <a:lnR w="9525" cap="flat" cmpd="sng" algn="ctr">
-                      <a:solidFill>
-                        <a:srgbClr val="CCCCCC"/>
-                      </a:solidFill>
-                      <a:prstDash val="solid"/>
-                      <a:round/>
-                      <a:headEnd type="none" w="med" len="med"/>
-                      <a:tailEnd type="none" w="med" len="med"/>
-                    </a:lnR>
-                    <a:lnT w="9525" cap="flat" cmpd="sng" algn="ctr">
-                      <a:solidFill>
-                        <a:srgbClr val="CCCCCC"/>
-                      </a:solidFill>
-                      <a:prstDash val="solid"/>
-                      <a:round/>
-                      <a:headEnd type="none" w="med" len="med"/>
-                      <a:tailEnd type="none" w="med" len="med"/>
-                    </a:lnT>
-                    <a:lnB w="9525" cap="flat" cmpd="sng" algn="ctr">
-                      <a:solidFill>
-                        <a:srgbClr val="CCCCCC"/>
-                      </a:solidFill>
-                      <a:prstDash val="solid"/>
-                      <a:round/>
-                      <a:headEnd type="none" w="med" len="med"/>
-                      <a:tailEnd type="none" w="med" len="med"/>
-                    </a:lnB>
-                  </a:tcPr>
-                </a:tc>
-                <a:tc>
-                  <a:txBody>
-                    <a:bodyPr/>
-                    <a:lstStyle/>
-                    <a:p>
-                      <a:pPr rtl="0" fontAlgn="b"/>
-                      <a:r>
-                        <a:rPr lang="en-US" sz="1200" b="0">
-                          <a:effectLst/>
-                          <a:latin typeface="Calibri" panose="020F0502020204030204" pitchFamily="34" charset="0"/>
-                        </a:rPr>
-                        <a:t>Grace O'Malley</a:t>
-                      </a:r>
-                    </a:p>
-                  </a:txBody>
-                  <a:tcPr marL="28575" marR="28575" marT="19050" marB="19050" anchor="b">
-                    <a:lnL w="9525" cap="flat" cmpd="sng" algn="ctr">
-                      <a:solidFill>
-                        <a:srgbClr val="CCCCCC"/>
-                      </a:solidFill>
-                      <a:prstDash val="solid"/>
-                      <a:round/>
-                      <a:headEnd type="none" w="med" len="med"/>
-                      <a:tailEnd type="none" w="med" len="med"/>
-                    </a:lnL>
-                    <a:lnR w="9525" cap="flat" cmpd="sng" algn="ctr">
-                      <a:solidFill>
-                        <a:srgbClr val="CCCCCC"/>
-                      </a:solidFill>
-                      <a:prstDash val="solid"/>
-                      <a:round/>
-                      <a:headEnd type="none" w="med" len="med"/>
-                      <a:tailEnd type="none" w="med" len="med"/>
-                    </a:lnR>
-                    <a:lnT w="9525" cap="flat" cmpd="sng" algn="ctr">
-                      <a:solidFill>
-                        <a:srgbClr val="CCCCCC"/>
-                      </a:solidFill>
-                      <a:prstDash val="solid"/>
-                      <a:round/>
-                      <a:headEnd type="none" w="med" len="med"/>
-                      <a:tailEnd type="none" w="med" len="med"/>
-                    </a:lnT>
-                    <a:lnB w="9525" cap="flat" cmpd="sng" algn="ctr">
-                      <a:solidFill>
-                        <a:srgbClr val="CCCCCC"/>
-                      </a:solidFill>
-                      <a:prstDash val="solid"/>
-                      <a:round/>
-                      <a:headEnd type="none" w="med" len="med"/>
-                      <a:tailEnd type="none" w="med" len="med"/>
-                    </a:lnB>
-                  </a:tcPr>
-                </a:tc>
-                <a:tc>
-                  <a:txBody>
-                    <a:bodyPr/>
-                    <a:lstStyle/>
-                    <a:p>
-                      <a:pPr rtl="0" fontAlgn="b"/>
-                      <a:r>
-                        <a:rPr lang="en-US" sz="1200" b="0">
-                          <a:effectLst/>
-                          <a:latin typeface="Calibri" panose="020F0502020204030204" pitchFamily="34" charset="0"/>
-                        </a:rPr>
-                        <a:t>Casey M</a:t>
-                      </a:r>
-                    </a:p>
-                  </a:txBody>
-                  <a:tcPr marL="28575" marR="28575" marT="19050" marB="19050" anchor="b">
-                    <a:lnL w="9525" cap="flat" cmpd="sng" algn="ctr">
-                      <a:solidFill>
-                        <a:srgbClr val="CCCCCC"/>
-                      </a:solidFill>
-                      <a:prstDash val="solid"/>
-                      <a:round/>
-                      <a:headEnd type="none" w="med" len="med"/>
-                      <a:tailEnd type="none" w="med" len="med"/>
-                    </a:lnL>
-                    <a:lnR w="9525" cap="flat" cmpd="sng" algn="ctr">
-                      <a:solidFill>
-                        <a:srgbClr val="CCCCCC"/>
-                      </a:solidFill>
-                      <a:prstDash val="solid"/>
-                      <a:round/>
-                      <a:headEnd type="none" w="med" len="med"/>
-                      <a:tailEnd type="none" w="med" len="med"/>
-                    </a:lnR>
-                    <a:lnT w="9525" cap="flat" cmpd="sng" algn="ctr">
-                      <a:solidFill>
-                        <a:srgbClr val="CCCCCC"/>
-                      </a:solidFill>
-                      <a:prstDash val="solid"/>
-                      <a:round/>
-                      <a:headEnd type="none" w="med" len="med"/>
-                      <a:tailEnd type="none" w="med" len="med"/>
-                    </a:lnT>
-                    <a:lnB w="9525" cap="flat" cmpd="sng" algn="ctr">
-                      <a:solidFill>
-                        <a:srgbClr val="CCCCCC"/>
-                      </a:solidFill>
-                      <a:prstDash val="solid"/>
-                      <a:round/>
-                      <a:headEnd type="none" w="med" len="med"/>
-                      <a:tailEnd type="none" w="med" len="med"/>
-                    </a:lnB>
-                  </a:tcPr>
-                </a:tc>
-                <a:tc>
-                  <a:txBody>
-                    <a:bodyPr/>
-                    <a:lstStyle/>
-                    <a:p>
-                      <a:pPr rtl="0" fontAlgn="b"/>
-                      <a:r>
-                        <a:rPr lang="en-US">
-                          <a:effectLst/>
-                        </a:rPr>
-                        <a:t>Angineh Parsadanians</a:t>
-                      </a:r>
-                    </a:p>
-                  </a:txBody>
-                  <a:tcPr marL="28575" marR="28575" marT="19050" marB="19050" anchor="b">
-                    <a:lnL w="9525" cap="flat" cmpd="sng" algn="ctr">
-                      <a:solidFill>
-                        <a:srgbClr val="CCCCCC"/>
-                      </a:solidFill>
-                      <a:prstDash val="solid"/>
-                      <a:round/>
-                      <a:headEnd type="none" w="med" len="med"/>
-                      <a:tailEnd type="none" w="med" len="med"/>
-                    </a:lnL>
-                    <a:lnR w="9525" cap="flat" cmpd="sng" algn="ctr">
-                      <a:solidFill>
-                        <a:srgbClr val="CCCCCC"/>
-                      </a:solidFill>
-                      <a:prstDash val="solid"/>
-                      <a:round/>
-                      <a:headEnd type="none" w="med" len="med"/>
-                      <a:tailEnd type="none" w="med" len="med"/>
-                    </a:lnR>
-                    <a:lnT w="9525" cap="flat" cmpd="sng" algn="ctr">
-                      <a:solidFill>
-                        <a:srgbClr val="CCCCCC"/>
-                      </a:solidFill>
-                      <a:prstDash val="solid"/>
-                      <a:round/>
-                      <a:headEnd type="none" w="med" len="med"/>
-                      <a:tailEnd type="none" w="med" len="med"/>
-                    </a:lnT>
-                    <a:lnB w="9525" cap="flat" cmpd="sng" algn="ctr">
-                      <a:solidFill>
-                        <a:srgbClr val="CCCCCC"/>
-                      </a:solidFill>
-                      <a:prstDash val="solid"/>
-                      <a:round/>
-                      <a:headEnd type="none" w="med" len="med"/>
-                      <a:tailEnd type="none" w="med" len="med"/>
-                    </a:lnB>
-                  </a:tcPr>
-                </a:tc>
-                <a:extLst>
-                  <a:ext uri="{0D108BD9-81ED-4DB2-BD59-A6C34878D82A}">
-                    <a16:rowId xmlns:a16="http://schemas.microsoft.com/office/drawing/2014/main" val="3419621362"/>
-                  </a:ext>
-                </a:extLst>
-              </a:tr>
-              <a:tr h="200025">
-                <a:tc>
-                  <a:txBody>
-                    <a:bodyPr/>
-                    <a:lstStyle/>
-                    <a:p>
-                      <a:pPr algn="r" rtl="0" fontAlgn="b"/>
-                      <a:r>
-                        <a:rPr lang="en-US" sz="1200" b="0">
-                          <a:effectLst/>
-                          <a:latin typeface="Calibri" panose="020F0502020204030204" pitchFamily="34" charset="0"/>
-                        </a:rPr>
-                        <a:t>3-May</a:t>
-                      </a:r>
-                    </a:p>
-                  </a:txBody>
-                  <a:tcPr marL="28575" marR="28575" marT="19050" marB="19050" anchor="b">
-                    <a:lnL w="9525" cap="flat" cmpd="sng" algn="ctr">
-                      <a:solidFill>
-                        <a:srgbClr val="CCCCCC"/>
-                      </a:solidFill>
-                      <a:prstDash val="solid"/>
-                      <a:round/>
-                      <a:headEnd type="none" w="med" len="med"/>
-                      <a:tailEnd type="none" w="med" len="med"/>
-                    </a:lnL>
-                    <a:lnR w="9525" cap="flat" cmpd="sng" algn="ctr">
-                      <a:solidFill>
-                        <a:srgbClr val="CCCCCC"/>
-                      </a:solidFill>
-                      <a:prstDash val="solid"/>
-                      <a:round/>
-                      <a:headEnd type="none" w="med" len="med"/>
-                      <a:tailEnd type="none" w="med" len="med"/>
-                    </a:lnR>
-                    <a:lnT w="9525" cap="flat" cmpd="sng" algn="ctr">
-                      <a:solidFill>
-                        <a:srgbClr val="CCCCCC"/>
-                      </a:solidFill>
-                      <a:prstDash val="solid"/>
-                      <a:round/>
-                      <a:headEnd type="none" w="med" len="med"/>
-                      <a:tailEnd type="none" w="med" len="med"/>
-                    </a:lnT>
-                    <a:lnB w="9525" cap="flat" cmpd="sng" algn="ctr">
-                      <a:solidFill>
-                        <a:srgbClr val="CCCCCC"/>
-                      </a:solidFill>
-                      <a:prstDash val="solid"/>
-                      <a:round/>
-                      <a:headEnd type="none" w="med" len="med"/>
-                      <a:tailEnd type="none" w="med" len="med"/>
-                    </a:lnB>
-                  </a:tcPr>
-                </a:tc>
-                <a:tc>
-                  <a:txBody>
-                    <a:bodyPr/>
-                    <a:lstStyle/>
-                    <a:p>
-                      <a:pPr rtl="0" fontAlgn="b"/>
-                      <a:r>
-                        <a:rPr lang="en-US">
-                          <a:effectLst/>
-                        </a:rPr>
-                        <a:t>Lena Patiño</a:t>
-                      </a:r>
-                    </a:p>
-                  </a:txBody>
-                  <a:tcPr marL="28575" marR="28575" marT="19050" marB="19050" anchor="b">
-                    <a:lnL w="9525" cap="flat" cmpd="sng" algn="ctr">
-                      <a:solidFill>
-                        <a:srgbClr val="CCCCCC"/>
-                      </a:solidFill>
-                      <a:prstDash val="solid"/>
-                      <a:round/>
-                      <a:headEnd type="none" w="med" len="med"/>
-                      <a:tailEnd type="none" w="med" len="med"/>
-                    </a:lnL>
-                    <a:lnR w="9525" cap="flat" cmpd="sng" algn="ctr">
-                      <a:solidFill>
-                        <a:srgbClr val="CCCCCC"/>
-                      </a:solidFill>
-                      <a:prstDash val="solid"/>
-                      <a:round/>
-                      <a:headEnd type="none" w="med" len="med"/>
-                      <a:tailEnd type="none" w="med" len="med"/>
-                    </a:lnR>
-                    <a:lnT w="9525" cap="flat" cmpd="sng" algn="ctr">
-                      <a:solidFill>
-                        <a:srgbClr val="CCCCCC"/>
-                      </a:solidFill>
-                      <a:prstDash val="solid"/>
-                      <a:round/>
-                      <a:headEnd type="none" w="med" len="med"/>
-                      <a:tailEnd type="none" w="med" len="med"/>
-                    </a:lnT>
-                    <a:lnB w="9525" cap="flat" cmpd="sng" algn="ctr">
-                      <a:solidFill>
-                        <a:srgbClr val="CCCCCC"/>
-                      </a:solidFill>
-                      <a:prstDash val="solid"/>
-                      <a:round/>
-                      <a:headEnd type="none" w="med" len="med"/>
-                      <a:tailEnd type="none" w="med" len="med"/>
-                    </a:lnB>
-                  </a:tcPr>
-                </a:tc>
-                <a:tc>
-                  <a:txBody>
-                    <a:bodyPr/>
-                    <a:lstStyle/>
-                    <a:p>
-                      <a:pPr rtl="0" fontAlgn="b"/>
-                      <a:r>
-                        <a:rPr lang="en-US" sz="1200" b="0">
-                          <a:effectLst/>
-                          <a:latin typeface="Calibri" panose="020F0502020204030204" pitchFamily="34" charset="0"/>
-                        </a:rPr>
-                        <a:t>Anindita</a:t>
-                      </a:r>
-                    </a:p>
-                  </a:txBody>
-                  <a:tcPr marL="28575" marR="28575" marT="19050" marB="19050" anchor="b">
-                    <a:lnL w="9525" cap="flat" cmpd="sng" algn="ctr">
-                      <a:solidFill>
-                        <a:srgbClr val="CCCCCC"/>
-                      </a:solidFill>
-                      <a:prstDash val="solid"/>
-                      <a:round/>
-                      <a:headEnd type="none" w="med" len="med"/>
-                      <a:tailEnd type="none" w="med" len="med"/>
-                    </a:lnL>
-                    <a:lnR w="9525" cap="flat" cmpd="sng" algn="ctr">
-                      <a:solidFill>
-                        <a:srgbClr val="CCCCCC"/>
-                      </a:solidFill>
-                      <a:prstDash val="solid"/>
-                      <a:round/>
-                      <a:headEnd type="none" w="med" len="med"/>
-                      <a:tailEnd type="none" w="med" len="med"/>
-                    </a:lnR>
-                    <a:lnT w="9525" cap="flat" cmpd="sng" algn="ctr">
-                      <a:solidFill>
-                        <a:srgbClr val="CCCCCC"/>
-                      </a:solidFill>
-                      <a:prstDash val="solid"/>
-                      <a:round/>
-                      <a:headEnd type="none" w="med" len="med"/>
-                      <a:tailEnd type="none" w="med" len="med"/>
-                    </a:lnT>
-                    <a:lnB w="9525" cap="flat" cmpd="sng" algn="ctr">
-                      <a:solidFill>
-                        <a:srgbClr val="CCCCCC"/>
-                      </a:solidFill>
-                      <a:prstDash val="solid"/>
-                      <a:round/>
-                      <a:headEnd type="none" w="med" len="med"/>
-                      <a:tailEnd type="none" w="med" len="med"/>
-                    </a:lnB>
-                  </a:tcPr>
-                </a:tc>
-                <a:tc>
-                  <a:txBody>
-                    <a:bodyPr/>
-                    <a:lstStyle/>
-                    <a:p>
-                      <a:pPr rtl="0" fontAlgn="b"/>
-                      <a:r>
-                        <a:rPr lang="en-US" sz="1200" b="0">
-                          <a:effectLst/>
-                          <a:latin typeface="Calibri" panose="020F0502020204030204" pitchFamily="34" charset="0"/>
-                        </a:rPr>
-                        <a:t>x</a:t>
-                      </a:r>
-                    </a:p>
-                  </a:txBody>
-                  <a:tcPr marL="28575" marR="28575" marT="19050" marB="19050" anchor="b">
-                    <a:lnL w="9525" cap="flat" cmpd="sng" algn="ctr">
-                      <a:solidFill>
-                        <a:srgbClr val="CCCCCC"/>
-                      </a:solidFill>
-                      <a:prstDash val="solid"/>
-                      <a:round/>
-                      <a:headEnd type="none" w="med" len="med"/>
-                      <a:tailEnd type="none" w="med" len="med"/>
-                    </a:lnL>
-                    <a:lnR w="9525" cap="flat" cmpd="sng" algn="ctr">
-                      <a:solidFill>
-                        <a:srgbClr val="CCCCCC"/>
-                      </a:solidFill>
-                      <a:prstDash val="solid"/>
-                      <a:round/>
-                      <a:headEnd type="none" w="med" len="med"/>
-                      <a:tailEnd type="none" w="med" len="med"/>
-                    </a:lnR>
-                    <a:lnT w="9525" cap="flat" cmpd="sng" algn="ctr">
-                      <a:solidFill>
-                        <a:srgbClr val="CCCCCC"/>
-                      </a:solidFill>
-                      <a:prstDash val="solid"/>
-                      <a:round/>
-                      <a:headEnd type="none" w="med" len="med"/>
-                      <a:tailEnd type="none" w="med" len="med"/>
-                    </a:lnT>
-                    <a:lnB w="9525" cap="flat" cmpd="sng" algn="ctr">
-                      <a:solidFill>
-                        <a:srgbClr val="CCCCCC"/>
-                      </a:solidFill>
-                      <a:prstDash val="solid"/>
-                      <a:round/>
-                      <a:headEnd type="none" w="med" len="med"/>
-                      <a:tailEnd type="none" w="med" len="med"/>
-                    </a:lnB>
-                  </a:tcPr>
-                </a:tc>
-                <a:tc>
-                  <a:txBody>
-                    <a:bodyPr/>
-                    <a:lstStyle/>
-                    <a:p>
-                      <a:pPr rtl="0" fontAlgn="b"/>
-                      <a:r>
-                        <a:rPr lang="en-US" sz="1200" b="0">
-                          <a:effectLst/>
-                          <a:latin typeface="Calibri" panose="020F0502020204030204" pitchFamily="34" charset="0"/>
-                        </a:rPr>
-                        <a:t>x</a:t>
-                      </a:r>
-                    </a:p>
-                  </a:txBody>
-                  <a:tcPr marL="28575" marR="28575" marT="19050" marB="19050" anchor="b">
-                    <a:lnL w="9525" cap="flat" cmpd="sng" algn="ctr">
-                      <a:solidFill>
-                        <a:srgbClr val="CCCCCC"/>
-                      </a:solidFill>
-                      <a:prstDash val="solid"/>
-                      <a:round/>
-                      <a:headEnd type="none" w="med" len="med"/>
-                      <a:tailEnd type="none" w="med" len="med"/>
-                    </a:lnL>
-                    <a:lnR w="9525" cap="flat" cmpd="sng" algn="ctr">
-                      <a:solidFill>
-                        <a:srgbClr val="CCCCCC"/>
-                      </a:solidFill>
-                      <a:prstDash val="solid"/>
-                      <a:round/>
-                      <a:headEnd type="none" w="med" len="med"/>
-                      <a:tailEnd type="none" w="med" len="med"/>
-                    </a:lnR>
-                    <a:lnT w="9525" cap="flat" cmpd="sng" algn="ctr">
-                      <a:solidFill>
-                        <a:srgbClr val="CCCCCC"/>
-                      </a:solidFill>
-                      <a:prstDash val="solid"/>
-                      <a:round/>
-                      <a:headEnd type="none" w="med" len="med"/>
-                      <a:tailEnd type="none" w="med" len="med"/>
-                    </a:lnT>
-                    <a:lnB w="9525" cap="flat" cmpd="sng" algn="ctr">
-                      <a:solidFill>
-                        <a:srgbClr val="CCCCCC"/>
-                      </a:solidFill>
-                      <a:prstDash val="solid"/>
-                      <a:round/>
-                      <a:headEnd type="none" w="med" len="med"/>
-                      <a:tailEnd type="none" w="med" len="med"/>
-                    </a:lnB>
-                  </a:tcPr>
-                </a:tc>
-                <a:tc>
-                  <a:txBody>
-                    <a:bodyPr/>
-                    <a:lstStyle/>
-                    <a:p>
-                      <a:pPr rtl="0" fontAlgn="b"/>
-                      <a:r>
-                        <a:rPr lang="en-US" dirty="0">
-                          <a:effectLst/>
-                        </a:rPr>
-                        <a:t>x</a:t>
-                      </a:r>
-                    </a:p>
-                  </a:txBody>
-                  <a:tcPr marL="28575" marR="28575" marT="19050" marB="19050" anchor="b">
-                    <a:lnL w="9525" cap="flat" cmpd="sng" algn="ctr">
-                      <a:solidFill>
-                        <a:srgbClr val="CCCCCC"/>
-                      </a:solidFill>
-                      <a:prstDash val="solid"/>
-                      <a:round/>
-                      <a:headEnd type="none" w="med" len="med"/>
-                      <a:tailEnd type="none" w="med" len="med"/>
-                    </a:lnL>
-                    <a:lnR w="9525" cap="flat" cmpd="sng" algn="ctr">
-                      <a:solidFill>
-                        <a:srgbClr val="CCCCCC"/>
-                      </a:solidFill>
-                      <a:prstDash val="solid"/>
-                      <a:round/>
-                      <a:headEnd type="none" w="med" len="med"/>
-                      <a:tailEnd type="none" w="med" len="med"/>
-                    </a:lnR>
-                    <a:lnT w="9525" cap="flat" cmpd="sng" algn="ctr">
-                      <a:solidFill>
-                        <a:srgbClr val="CCCCCC"/>
-                      </a:solidFill>
-                      <a:prstDash val="solid"/>
-                      <a:round/>
-                      <a:headEnd type="none" w="med" len="med"/>
-                      <a:tailEnd type="none" w="med" len="med"/>
-                    </a:lnT>
-                    <a:lnB w="9525" cap="flat" cmpd="sng" algn="ctr">
-                      <a:solidFill>
-                        <a:srgbClr val="CCCCCC"/>
-                      </a:solidFill>
-                      <a:prstDash val="solid"/>
-                      <a:round/>
-                      <a:headEnd type="none" w="med" len="med"/>
-                      <a:tailEnd type="none" w="med" len="med"/>
-                    </a:lnB>
-                  </a:tcPr>
-                </a:tc>
-                <a:extLst>
-                  <a:ext uri="{0D108BD9-81ED-4DB2-BD59-A6C34878D82A}">
-                    <a16:rowId xmlns:a16="http://schemas.microsoft.com/office/drawing/2014/main" val="4116234227"/>
-                  </a:ext>
-                </a:extLst>
-              </a:tr>
-            </a:tbl>
-          </a:graphicData>
-        </a:graphic>
-      </p:graphicFrame>
+          </p:nvPr>
+        </p:nvSpPr>
+        <p:spPr/>
+        <p:txBody>
+          <a:bodyPr/>
+          <a:lstStyle/>
+          <a:p>
+            <a:r>
+              <a:rPr lang="en-US" dirty="0"/>
+              <a:t>11 min + 2 min for questions</a:t>
+            </a:r>
+          </a:p>
+          <a:p>
+            <a:r>
+              <a:rPr lang="en-US" dirty="0"/>
+              <a:t>Please read assignment directions </a:t>
+            </a:r>
+            <a:r>
+              <a:rPr lang="en-US" b="1" dirty="0"/>
+              <a:t>carefully</a:t>
+            </a:r>
+          </a:p>
+          <a:p>
+            <a:endParaRPr lang="en-US" b="1" dirty="0"/>
+          </a:p>
+          <a:p>
+            <a:r>
+              <a:rPr lang="en-US" dirty="0"/>
+              <a:t>All final materials due Apr 23</a:t>
+            </a:r>
+          </a:p>
+          <a:p>
+            <a:endParaRPr lang="en-US" dirty="0"/>
+          </a:p>
+          <a:p>
+            <a:r>
+              <a:rPr lang="en-US" dirty="0"/>
+              <a:t>Send your presentation ahead of time or come with it on a USB 10 min early to class</a:t>
+            </a:r>
+          </a:p>
+        </p:txBody>
+      </p:sp>
     </p:spTree>
     <p:extLst>
       <p:ext uri="{BB962C8B-B14F-4D97-AF65-F5344CB8AC3E}">
-        <p14:creationId xmlns:p14="http://schemas.microsoft.com/office/powerpoint/2010/main" val="54558105"/>
+        <p14:creationId xmlns:p14="http://schemas.microsoft.com/office/powerpoint/2010/main" val="3527642166"/>
       </p:ext>
     </p:extLst>
   </p:cSld>
@@ -5418,120 +3427,6 @@
           <p:cNvPr id="2" name="Title 1">
             <a:extLst>
               <a:ext uri="{FF2B5EF4-FFF2-40B4-BE49-F238E27FC236}">
-                <a16:creationId xmlns:a16="http://schemas.microsoft.com/office/drawing/2014/main" id="{D23CC5D4-7773-297E-9CA9-DE6874CC05DB}"/>
-              </a:ext>
-            </a:extLst>
-          </p:cNvPr>
-          <p:cNvSpPr>
-            <a:spLocks noGrp="1"/>
-          </p:cNvSpPr>
-          <p:nvPr>
-            <p:ph type="title"/>
-          </p:nvPr>
-        </p:nvSpPr>
-        <p:spPr/>
-        <p:txBody>
-          <a:bodyPr/>
-          <a:lstStyle/>
-          <a:p>
-            <a:r>
-              <a:rPr lang="en-US" dirty="0"/>
-              <a:t>Final Presentation Quick Q &amp; A</a:t>
-            </a:r>
-          </a:p>
-        </p:txBody>
-      </p:sp>
-      <p:sp>
-        <p:nvSpPr>
-          <p:cNvPr id="3" name="Content Placeholder 2">
-            <a:extLst>
-              <a:ext uri="{FF2B5EF4-FFF2-40B4-BE49-F238E27FC236}">
-                <a16:creationId xmlns:a16="http://schemas.microsoft.com/office/drawing/2014/main" id="{2AFAF419-B35D-21DF-0F98-BA3A76CC5180}"/>
-              </a:ext>
-            </a:extLst>
-          </p:cNvPr>
-          <p:cNvSpPr>
-            <a:spLocks noGrp="1"/>
-          </p:cNvSpPr>
-          <p:nvPr>
-            <p:ph idx="1"/>
-          </p:nvPr>
-        </p:nvSpPr>
-        <p:spPr/>
-        <p:txBody>
-          <a:bodyPr/>
-          <a:lstStyle/>
-          <a:p>
-            <a:r>
-              <a:rPr lang="en-US" dirty="0"/>
-              <a:t>11 min + 2 min for questions</a:t>
-            </a:r>
-          </a:p>
-          <a:p>
-            <a:r>
-              <a:rPr lang="en-US" dirty="0"/>
-              <a:t>Please read assignment directions </a:t>
-            </a:r>
-            <a:r>
-              <a:rPr lang="en-US" b="1" dirty="0"/>
-              <a:t>carefully</a:t>
-            </a:r>
-          </a:p>
-          <a:p>
-            <a:endParaRPr lang="en-US" b="1" dirty="0"/>
-          </a:p>
-          <a:p>
-            <a:r>
-              <a:rPr lang="en-US" dirty="0"/>
-              <a:t>All final materials due Apr 23</a:t>
-            </a:r>
-          </a:p>
-          <a:p>
-            <a:endParaRPr lang="en-US" dirty="0"/>
-          </a:p>
-          <a:p>
-            <a:r>
-              <a:rPr lang="en-US" dirty="0"/>
-              <a:t>Send your presentation ahead of time or come with it on a USB 10 min early to class</a:t>
-            </a:r>
-          </a:p>
-        </p:txBody>
-      </p:sp>
-    </p:spTree>
-    <p:extLst>
-      <p:ext uri="{BB962C8B-B14F-4D97-AF65-F5344CB8AC3E}">
-        <p14:creationId xmlns:p14="http://schemas.microsoft.com/office/powerpoint/2010/main" val="3527642166"/>
-      </p:ext>
-    </p:extLst>
-  </p:cSld>
-  <p:clrMapOvr>
-    <a:masterClrMapping/>
-  </p:clrMapOvr>
-</p:sld>
-</file>
-
-<file path=ppt/slides/slide5.xml><?xml version="1.0" encoding="utf-8"?>
-<p:sld xmlns:a="http://schemas.openxmlformats.org/drawingml/2006/main" xmlns:r="http://schemas.openxmlformats.org/officeDocument/2006/relationships" xmlns:p="http://schemas.openxmlformats.org/presentationml/2006/main" show="0">
-  <p:cSld>
-    <p:spTree>
-      <p:nvGrpSpPr>
-        <p:cNvPr id="1" name=""/>
-        <p:cNvGrpSpPr/>
-        <p:nvPr/>
-      </p:nvGrpSpPr>
-      <p:grpSpPr>
-        <a:xfrm>
-          <a:off x="0" y="0"/>
-          <a:ext cx="0" cy="0"/>
-          <a:chOff x="0" y="0"/>
-          <a:chExt cx="0" cy="0"/>
-        </a:xfrm>
-      </p:grpSpPr>
-      <p:sp>
-        <p:nvSpPr>
-          <p:cNvPr id="2" name="Title 1">
-            <a:extLst>
-              <a:ext uri="{FF2B5EF4-FFF2-40B4-BE49-F238E27FC236}">
                 <a16:creationId xmlns:a16="http://schemas.microsoft.com/office/drawing/2014/main" id="{821AE047-3A37-1C48-B6ED-8CF17E084914}"/>
               </a:ext>
             </a:extLst>
@@ -5628,7 +3523,7 @@
 </p:sld>
 </file>
 
-<file path=ppt/slides/slide6.xml><?xml version="1.0" encoding="utf-8"?>
+<file path=ppt/slides/slide5.xml><?xml version="1.0" encoding="utf-8"?>
 <p:sld xmlns:a="http://schemas.openxmlformats.org/drawingml/2006/main" xmlns:r="http://schemas.openxmlformats.org/officeDocument/2006/relationships" xmlns:p="http://schemas.openxmlformats.org/presentationml/2006/main">
   <p:cSld>
     <p:spTree>
